--- a/docs/common/liveries/cu/template.pptx
+++ b/docs/common/liveries/cu/template.pptx
@@ -42,22 +42,22 @@
       </p:grpSpPr>
       <p:pic>
         <p:nvPicPr>
-          <p:cNvPr id="11" name="Logo (dark)"/>
+          <p:cNvPr id="11" name="Sign-off (dark)"/>
           <p:cNvPicPr>
             <a:picLocks noChangeAspect="1"/>
           </p:cNvPicPr>
           <p:nvPr userDrawn="1"/>
         </p:nvPicPr>
         <p:blipFill>
-          <a:blip r:embed="rId2"/>
+          <a:blip r:embed="rId3"/>
           <a:stretch>
             <a:fillRect/>
           </a:stretch>
         </p:blipFill>
         <p:spPr>
           <a:xfrm>
-            <a:off x="731520" y="411480"/>
-            <a:ext cx="3958232" cy="617220"/>
+            <a:off x="731520" y="6309360"/>
+            <a:ext cx="2199018" cy="342900"/>
           </a:xfrm>
           <a:prstGeom prst="rect">
             <a:avLst/>
@@ -254,7 +254,7 @@
         </p:nvSpPr>
         <p:spPr>
           <a:xfrm>
-            <a:off x="12192" y="6480810"/>
+            <a:off x="11704320" y="6480810"/>
             <a:ext cx="475488" cy="363474"/>
           </a:xfrm>
         </p:spPr>
@@ -408,7 +408,7 @@
         </p:nvSpPr>
         <p:spPr>
           <a:xfrm>
-            <a:off x="12192" y="6480810"/>
+            <a:off x="11704320" y="6480810"/>
             <a:ext cx="475488" cy="363474"/>
           </a:xfrm>
         </p:spPr>
@@ -443,7 +443,7 @@
         </p:nvSpPr>
         <p:spPr>
           <a:xfrm>
-            <a:off x="10436352" y="6556248"/>
+            <a:off x="9022080" y="6556248"/>
             <a:ext cx="1377696" cy="185166"/>
           </a:xfrm>
           <a:prstGeom prst="rect">
@@ -542,22 +542,22 @@
       </p:grpSpPr>
       <p:pic>
         <p:nvPicPr>
-          <p:cNvPr id="11" name="Logo (dark)"/>
+          <p:cNvPr id="11" name="Sign-off (dark)"/>
           <p:cNvPicPr>
             <a:picLocks noChangeAspect="1"/>
           </p:cNvPicPr>
           <p:nvPr userDrawn="1"/>
         </p:nvPicPr>
         <p:blipFill>
-          <a:blip r:embed="rId2"/>
+          <a:blip r:embed="rId3"/>
           <a:stretch>
             <a:fillRect/>
           </a:stretch>
         </p:blipFill>
         <p:spPr>
           <a:xfrm>
-            <a:off x="731520" y="548640"/>
-            <a:ext cx="3518428" cy="548640"/>
+            <a:off x="731520" y="6309360"/>
+            <a:ext cx="2199018" cy="342900"/>
           </a:xfrm>
           <a:prstGeom prst="rect">
             <a:avLst/>
@@ -665,7 +665,7 @@
         </p:nvSpPr>
         <p:spPr>
           <a:xfrm>
-            <a:off x="12192" y="6480810"/>
+            <a:off x="11704320" y="6480810"/>
             <a:ext cx="475488" cy="363474"/>
           </a:xfrm>
         </p:spPr>
@@ -700,7 +700,7 @@
         </p:nvSpPr>
         <p:spPr>
           <a:xfrm>
-            <a:off x="10436352" y="6556248"/>
+            <a:off x="9022080" y="6556248"/>
             <a:ext cx="1377696" cy="185166"/>
           </a:xfrm>
           <a:prstGeom prst="rect">
@@ -887,7 +887,7 @@
         </p:nvSpPr>
         <p:spPr>
           <a:xfrm>
-            <a:off x="12192" y="6480810"/>
+            <a:off x="11704320" y="6480810"/>
             <a:ext cx="475488" cy="363474"/>
           </a:xfrm>
         </p:spPr>
@@ -922,7 +922,7 @@
         </p:nvSpPr>
         <p:spPr>
           <a:xfrm>
-            <a:off x="10436352" y="6556248"/>
+            <a:off x="9022080" y="6556248"/>
             <a:ext cx="1377696" cy="185166"/>
           </a:xfrm>
           <a:prstGeom prst="rect">
@@ -1191,7 +1191,7 @@
         </p:nvSpPr>
         <p:spPr>
           <a:xfrm>
-            <a:off x="12192" y="6480810"/>
+            <a:off x="11704320" y="6480810"/>
             <a:ext cx="475488" cy="363474"/>
           </a:xfrm>
         </p:spPr>
@@ -1226,7 +1226,7 @@
         </p:nvSpPr>
         <p:spPr>
           <a:xfrm>
-            <a:off x="10436352" y="6556248"/>
+            <a:off x="9022080" y="6556248"/>
             <a:ext cx="1377696" cy="185166"/>
           </a:xfrm>
           <a:prstGeom prst="rect">
@@ -1430,7 +1430,7 @@
         </p:nvSpPr>
         <p:spPr>
           <a:xfrm>
-            <a:off x="12192" y="6480810"/>
+            <a:off x="11704320" y="6480810"/>
             <a:ext cx="475488" cy="363474"/>
           </a:xfrm>
         </p:spPr>
@@ -1465,7 +1465,7 @@
         </p:nvSpPr>
         <p:spPr>
           <a:xfrm>
-            <a:off x="10436352" y="6556248"/>
+            <a:off x="9022080" y="6556248"/>
             <a:ext cx="1377696" cy="185166"/>
           </a:xfrm>
           <a:prstGeom prst="rect">
@@ -1566,7 +1566,7 @@
         </p:nvSpPr>
         <p:spPr>
           <a:xfrm>
-            <a:off x="12192" y="6480810"/>
+            <a:off x="11704320" y="6480810"/>
             <a:ext cx="475488" cy="363474"/>
           </a:xfrm>
         </p:spPr>
@@ -1601,7 +1601,7 @@
         </p:nvSpPr>
         <p:spPr>
           <a:xfrm>
-            <a:off x="10436352" y="6556248"/>
+            <a:off x="9022080" y="6556248"/>
             <a:ext cx="1377696" cy="185166"/>
           </a:xfrm>
           <a:prstGeom prst="rect">
@@ -1697,7 +1697,252 @@
       </p:grpSpPr>
       <p:pic>
         <p:nvPicPr>
-          <p:cNvPr id="15" name="Content art"/>
+          <p:cNvPr id="15" name="Art (content)"/>
+          <p:cNvPicPr>
+            <a:picLocks noChangeAspect="1"/>
+          </p:cNvPicPr>
+          <p:nvPr userDrawn="1"/>
+        </p:nvPicPr>
+        <p:blipFill>
+          <a:blip r:embed="rId4"/>
+          <a:stretch>
+            <a:fillRect/>
+          </a:stretch>
+        </p:blipFill>
+        <p:spPr>
+          <a:xfrm>
+            <a:off x="0" y="0"/>
+            <a:ext cx="12192000" cy="6858000"/>
+          </a:xfrm>
+          <a:prstGeom prst="rect">
+            <a:avLst/>
+          </a:prstGeom>
+        </p:spPr>
+      </p:pic>
+      <p:sp>
+        <p:nvSpPr>
+          <p:cNvPr id="11" name="Title tab"/>
+          <p:cNvSpPr/>
+          <p:nvPr userDrawn="1"/>
+        </p:nvSpPr>
+        <p:spPr>
+          <a:xfrm>
+            <a:off x="0" y="336042"/>
+            <a:ext cx="219456" cy="654253"/>
+          </a:xfrm>
+          <a:prstGeom prst="rect">
+            <a:avLst/>
+          </a:prstGeom>
+          <a:solidFill>
+            <a:schemeClr val="accent4"/>
+          </a:solidFill>
+          <a:ln>
+            <a:noFill/>
+          </a:ln>
+        </p:spPr>
+      </p:sp>
+      <p:cxnSp>
+        <p:nvCxnSpPr>
+          <p:cNvPr id="12" name="Title rule"/>
+          <p:cNvCxnSpPr/>
+          <p:nvPr userDrawn="1"/>
+        </p:nvCxnSpPr>
+        <p:spPr>
+          <a:xfrm>
+            <a:off x="731520" y="990295"/>
+            <a:ext cx="10728960" cy="0"/>
+          </a:xfrm>
+          <a:prstGeom prst="line">
+            <a:avLst/>
+          </a:prstGeom>
+          <a:ln w="9525">
+            <a:solidFill>
+              <a:schemeClr val="tx1">
+                <a:alpha val="30000"/>
+              </a:schemeClr>
+            </a:solidFill>
+          </a:ln>
+        </p:spPr>
+      </p:cxnSp>
+      <p:sp>
+        <p:nvSpPr>
+          <p:cNvPr id="13" name="Title Placeholder"/>
+          <p:cNvSpPr>
+            <a:spLocks noGrp="1"/>
+          </p:cNvSpPr>
+          <p:nvPr>
+            <p:ph type="title"/>
+          </p:nvPr>
+        </p:nvSpPr>
+        <p:spPr>
+          <a:xfrm>
+            <a:off x="731520" y="336042"/>
+            <a:ext cx="10728960" cy="654253"/>
+          </a:xfrm>
+          <a:prstGeom prst="rect">
+            <a:avLst/>
+          </a:prstGeom>
+        </p:spPr>
+        <p:txBody>
+          <a:bodyPr vert="horz" lIns="0" tIns="0" rIns="0" bIns="0" anchor="ctr">
+            <a:normAutofit/>
+          </a:bodyPr>
+          <a:lstStyle/>
+          <a:p>
+            <a:r>
+              <a:rPr lang="en-US"/>
+              <a:t>Click to edit Master title style</a:t>
+            </a:r>
+          </a:p>
+        </p:txBody>
+      </p:sp>
+      <p:sp>
+        <p:nvSpPr>
+          <p:cNvPr id="14" name="Text Placeholder"/>
+          <p:cNvSpPr>
+            <a:spLocks noGrp="1"/>
+          </p:cNvSpPr>
+          <p:nvPr>
+            <p:ph type="body" idx="1"/>
+          </p:nvPr>
+        </p:nvSpPr>
+        <p:spPr>
+          <a:xfrm>
+            <a:off x="731520" y="1143229"/>
+            <a:ext cx="10728960" cy="5181219"/>
+          </a:xfrm>
+          <a:prstGeom prst="rect">
+            <a:avLst/>
+          </a:prstGeom>
+        </p:spPr>
+        <p:txBody>
+          <a:bodyPr vert="horz" lIns="0" tIns="45720" rIns="0" bIns="45720">
+            <a:normAutofit/>
+          </a:bodyPr>
+          <a:lstStyle/>
+          <a:p>
+            <a:pPr lvl="0"/>
+            <a:r>
+              <a:rPr lang="en-US"/>
+              <a:t>Click to edit Master text styles</a:t>
+            </a:r>
+          </a:p>
+        </p:txBody>
+      </p:sp>
+      <p:sp>
+        <p:nvSpPr>
+          <p:cNvPr id="16" name="Slide Number Placeholder"/>
+          <p:cNvSpPr>
+            <a:spLocks noGrp="1"/>
+          </p:cNvSpPr>
+          <p:nvPr>
+            <p:ph type="sldNum" sz="quarter" idx="22"/>
+          </p:nvPr>
+        </p:nvSpPr>
+        <p:spPr>
+          <a:xfrm>
+            <a:off x="11704320" y="6480810"/>
+            <a:ext cx="475488" cy="363474"/>
+          </a:xfrm>
+        </p:spPr>
+        <p:txBody>
+          <a:bodyPr anchor="ctr"/>
+          <a:lstStyle>
+            <a:lvl1pPr algn="ctr">
+              <a:defRPr sz="1200" b="1">
+                <a:solidFill>
+                  <a:schemeClr val="tx1"/>
+                </a:solidFill>
+              </a:defRPr>
+            </a:lvl1pPr>
+          </a:lstStyle>
+          <a:p>
+            <a:fld id="{C5EF2332-01BF-834F-8236-50238282D533}" type="slidenum">
+              <a:rPr lang="en-US"/>
+              <a:t>‹#›</a:t>
+            </a:fld>
+          </a:p>
+        </p:txBody>
+      </p:sp>
+      <p:sp>
+        <p:nvSpPr>
+          <p:cNvPr id="17" name="Date Placeholder"/>
+          <p:cNvSpPr>
+            <a:spLocks noGrp="1"/>
+          </p:cNvSpPr>
+          <p:nvPr>
+            <p:ph type="dt" sz="half" idx="20"/>
+          </p:nvPr>
+        </p:nvSpPr>
+        <p:spPr>
+          <a:xfrm>
+            <a:off x="9022080" y="6556248"/>
+            <a:ext cx="1377696" cy="185166"/>
+          </a:xfrm>
+          <a:prstGeom prst="rect">
+            <a:avLst/>
+          </a:prstGeom>
+        </p:spPr>
+        <p:txBody>
+          <a:bodyPr vert="horz" lIns="0" tIns="0" rIns="0" bIns="0" anchor="ctr"/>
+          <a:lstStyle>
+            <a:lvl1pPr algn="r">
+              <a:defRPr sz="900">
+                <a:solidFill>
+                  <a:schemeClr val="tx1"/>
+                </a:solidFill>
+              </a:defRPr>
+            </a:lvl1pPr>
+          </a:lstStyle>
+          <a:p>
+            <a:r>
+              <a:rPr lang="en-US"/>
+              <a:t/>
+            </a:r>
+          </a:p>
+        </p:txBody>
+      </p:sp>
+      <p:sp>
+        <p:nvSpPr>
+          <p:cNvPr id="18" name="Footer Placeholder"/>
+          <p:cNvSpPr>
+            <a:spLocks noGrp="1"/>
+          </p:cNvSpPr>
+          <p:nvPr>
+            <p:ph type="ftr" sz="quarter" idx="21"/>
+          </p:nvPr>
+        </p:nvSpPr>
+        <p:spPr>
+          <a:xfrm>
+            <a:off x="560832" y="6556248"/>
+            <a:ext cx="4145280" cy="185166"/>
+          </a:xfrm>
+          <a:prstGeom prst="rect">
+            <a:avLst/>
+          </a:prstGeom>
+        </p:spPr>
+        <p:txBody>
+          <a:bodyPr vert="horz" lIns="0" tIns="0" rIns="0" bIns="0" anchor="ctr"/>
+          <a:lstStyle>
+            <a:lvl1pPr algn="l">
+              <a:defRPr sz="900">
+                <a:solidFill>
+                  <a:schemeClr val="tx1"/>
+                </a:solidFill>
+              </a:defRPr>
+            </a:lvl1pPr>
+          </a:lstStyle>
+          <a:p>
+            <a:r>
+              <a:rPr lang="en-US"/>
+              <a:t/>
+            </a:r>
+          </a:p>
+        </p:txBody>
+      </p:sp>
+      <p:pic>
+        <p:nvPicPr>
+          <p:cNvPr id="19" name="Sign-off (light)"/>
           <p:cNvPicPr>
             <a:picLocks noChangeAspect="1"/>
           </p:cNvPicPr>
@@ -1711,253 +1956,8 @@
         </p:blipFill>
         <p:spPr>
           <a:xfrm>
-            <a:off x="0" y="0"/>
-            <a:ext cx="12192000" cy="6858000"/>
-          </a:xfrm>
-          <a:prstGeom prst="rect">
-            <a:avLst/>
-          </a:prstGeom>
-        </p:spPr>
-      </p:pic>
-      <p:sp>
-        <p:nvSpPr>
-          <p:cNvPr id="11" name="Title tab"/>
-          <p:cNvSpPr/>
-          <p:nvPr userDrawn="1"/>
-        </p:nvSpPr>
-        <p:spPr>
-          <a:xfrm>
-            <a:off x="0" y="336042"/>
-            <a:ext cx="219456" cy="654253"/>
-          </a:xfrm>
-          <a:prstGeom prst="rect">
-            <a:avLst/>
-          </a:prstGeom>
-          <a:solidFill>
-            <a:schemeClr val="accent4"/>
-          </a:solidFill>
-          <a:ln>
-            <a:noFill/>
-          </a:ln>
-        </p:spPr>
-      </p:sp>
-      <p:cxnSp>
-        <p:nvCxnSpPr>
-          <p:cNvPr id="12" name="Title rule"/>
-          <p:cNvCxnSpPr/>
-          <p:nvPr userDrawn="1"/>
-        </p:nvCxnSpPr>
-        <p:spPr>
-          <a:xfrm>
-            <a:off x="731520" y="990295"/>
-            <a:ext cx="10728960" cy="0"/>
-          </a:xfrm>
-          <a:prstGeom prst="line">
-            <a:avLst/>
-          </a:prstGeom>
-          <a:ln w="9525">
-            <a:solidFill>
-              <a:schemeClr val="tx1">
-                <a:alpha val="30000"/>
-              </a:schemeClr>
-            </a:solidFill>
-          </a:ln>
-        </p:spPr>
-      </p:cxnSp>
-      <p:sp>
-        <p:nvSpPr>
-          <p:cNvPr id="13" name="Title Placeholder"/>
-          <p:cNvSpPr>
-            <a:spLocks noGrp="1"/>
-          </p:cNvSpPr>
-          <p:nvPr>
-            <p:ph type="title"/>
-          </p:nvPr>
-        </p:nvSpPr>
-        <p:spPr>
-          <a:xfrm>
-            <a:off x="731520" y="336042"/>
-            <a:ext cx="7591825" cy="654253"/>
-          </a:xfrm>
-          <a:prstGeom prst="rect">
-            <a:avLst/>
-          </a:prstGeom>
-        </p:spPr>
-        <p:txBody>
-          <a:bodyPr vert="horz" lIns="0" tIns="0" rIns="0" bIns="0" anchor="ctr">
-            <a:normAutofit/>
-          </a:bodyPr>
-          <a:lstStyle/>
-          <a:p>
-            <a:r>
-              <a:rPr lang="en-US"/>
-              <a:t>Click to edit Master title style</a:t>
-            </a:r>
-          </a:p>
-        </p:txBody>
-      </p:sp>
-      <p:sp>
-        <p:nvSpPr>
-          <p:cNvPr id="14" name="Text Placeholder"/>
-          <p:cNvSpPr>
-            <a:spLocks noGrp="1"/>
-          </p:cNvSpPr>
-          <p:nvPr>
-            <p:ph type="body" idx="1"/>
-          </p:nvPr>
-        </p:nvSpPr>
-        <p:spPr>
-          <a:xfrm>
-            <a:off x="731520" y="1143229"/>
-            <a:ext cx="10728960" cy="5181219"/>
-          </a:xfrm>
-          <a:prstGeom prst="rect">
-            <a:avLst/>
-          </a:prstGeom>
-        </p:spPr>
-        <p:txBody>
-          <a:bodyPr vert="horz" lIns="0" tIns="45720" rIns="0" bIns="45720">
-            <a:normAutofit/>
-          </a:bodyPr>
-          <a:lstStyle/>
-          <a:p>
-            <a:pPr lvl="0"/>
-            <a:r>
-              <a:rPr lang="en-US"/>
-              <a:t>Click to edit Master text styles</a:t>
-            </a:r>
-          </a:p>
-        </p:txBody>
-      </p:sp>
-      <p:sp>
-        <p:nvSpPr>
-          <p:cNvPr id="17" name="Slide Number Placeholder"/>
-          <p:cNvSpPr>
-            <a:spLocks noGrp="1"/>
-          </p:cNvSpPr>
-          <p:nvPr>
-            <p:ph type="sldNum" sz="quarter" idx="22"/>
-          </p:nvPr>
-        </p:nvSpPr>
-        <p:spPr>
-          <a:xfrm>
-            <a:off x="12192" y="6480810"/>
-            <a:ext cx="475488" cy="363474"/>
-          </a:xfrm>
-        </p:spPr>
-        <p:txBody>
-          <a:bodyPr anchor="ctr"/>
-          <a:lstStyle>
-            <a:lvl1pPr algn="ctr">
-              <a:defRPr sz="1200" b="1">
-                <a:solidFill>
-                  <a:schemeClr val="tx1"/>
-                </a:solidFill>
-              </a:defRPr>
-            </a:lvl1pPr>
-          </a:lstStyle>
-          <a:p>
-            <a:fld id="{C5EF2332-01BF-834F-8236-50238282D533}" type="slidenum">
-              <a:rPr lang="en-US"/>
-              <a:t>‹#›</a:t>
-            </a:fld>
-          </a:p>
-        </p:txBody>
-      </p:sp>
-      <p:sp>
-        <p:nvSpPr>
-          <p:cNvPr id="18" name="Date Placeholder"/>
-          <p:cNvSpPr>
-            <a:spLocks noGrp="1"/>
-          </p:cNvSpPr>
-          <p:nvPr>
-            <p:ph type="dt" sz="half" idx="20"/>
-          </p:nvPr>
-        </p:nvSpPr>
-        <p:spPr>
-          <a:xfrm>
-            <a:off x="10436352" y="6556248"/>
-            <a:ext cx="1377696" cy="185166"/>
-          </a:xfrm>
-          <a:prstGeom prst="rect">
-            <a:avLst/>
-          </a:prstGeom>
-        </p:spPr>
-        <p:txBody>
-          <a:bodyPr vert="horz" lIns="0" tIns="0" rIns="0" bIns="0" anchor="ctr"/>
-          <a:lstStyle>
-            <a:lvl1pPr algn="r">
-              <a:defRPr sz="900">
-                <a:solidFill>
-                  <a:schemeClr val="tx1"/>
-                </a:solidFill>
-              </a:defRPr>
-            </a:lvl1pPr>
-          </a:lstStyle>
-          <a:p>
-            <a:r>
-              <a:rPr lang="en-US"/>
-              <a:t/>
-            </a:r>
-          </a:p>
-        </p:txBody>
-      </p:sp>
-      <p:sp>
-        <p:nvSpPr>
-          <p:cNvPr id="19" name="Footer Placeholder"/>
-          <p:cNvSpPr>
-            <a:spLocks noGrp="1"/>
-          </p:cNvSpPr>
-          <p:nvPr>
-            <p:ph type="ftr" sz="quarter" idx="21"/>
-          </p:nvPr>
-        </p:nvSpPr>
-        <p:spPr>
-          <a:xfrm>
-            <a:off x="560832" y="6556248"/>
-            <a:ext cx="4145280" cy="185166"/>
-          </a:xfrm>
-          <a:prstGeom prst="rect">
-            <a:avLst/>
-          </a:prstGeom>
-        </p:spPr>
-        <p:txBody>
-          <a:bodyPr vert="horz" lIns="0" tIns="0" rIns="0" bIns="0" anchor="ctr"/>
-          <a:lstStyle>
-            <a:lvl1pPr algn="l">
-              <a:defRPr sz="900">
-                <a:solidFill>
-                  <a:schemeClr val="tx1"/>
-                </a:solidFill>
-              </a:defRPr>
-            </a:lvl1pPr>
-          </a:lstStyle>
-          <a:p>
-            <a:r>
-              <a:rPr lang="en-US"/>
-              <a:t/>
-            </a:r>
-          </a:p>
-        </p:txBody>
-      </p:sp>
-      <p:pic>
-        <p:nvPicPr>
-          <p:cNvPr id="16" name="Logo (light)"/>
-          <p:cNvPicPr>
-            <a:picLocks noChangeAspect="1"/>
-          </p:cNvPicPr>
-          <p:nvPr userDrawn="1"/>
-        </p:nvPicPr>
-        <p:blipFill>
-          <a:blip r:embed="rId2"/>
-          <a:stretch>
-            <a:fillRect/>
-          </a:stretch>
-        </p:blipFill>
-        <p:spPr>
-          <a:xfrm>
-            <a:off x="8628145" y="365531"/>
-            <a:ext cx="2832335" cy="441655"/>
+            <a:off x="731520" y="6309360"/>
+            <a:ext cx="2199018" cy="342900"/>
           </a:xfrm>
           <a:prstGeom prst="rect">
             <a:avLst/>

--- a/docs/common/liveries/cu/template.pptx
+++ b/docs/common/liveries/cu/template.pptx
@@ -1673,6 +1673,602 @@
 </p:sldLayout>
 </file>
 
+<file path=ppt/slideLayouts/slideLayout8.xml><?xml version="1.0" encoding="utf-8"?>
+<p:sldLayout xmlns:a="http://schemas.openxmlformats.org/drawingml/2006/main" xmlns:r="http://schemas.openxmlformats.org/officeDocument/2006/relationships" xmlns:p="http://schemas.openxmlformats.org/presentationml/2006/main" type="obj" preserve="1" showMasterSp="0">
+  <p:cSld name="Closing">
+    <p:bg>
+      <p:bgPr>
+        <a:solidFill>
+          <a:schemeClr val="tx2"/>
+        </a:solidFill>
+        <a:effectLst/>
+      </p:bgPr>
+    </p:bg>
+    <p:spTree>
+      <p:nvGrpSpPr>
+        <p:cNvPr id="1" name=""/>
+        <p:cNvGrpSpPr/>
+        <p:nvPr/>
+      </p:nvGrpSpPr>
+      <p:grpSpPr>
+        <a:xfrm>
+          <a:off x="0" y="0"/>
+          <a:ext cx="0" cy="0"/>
+          <a:chOff x="0" y="0"/>
+          <a:chExt cx="0" cy="0"/>
+        </a:xfrm>
+      </p:grpSpPr>
+      <p:pic>
+        <p:nvPicPr>
+          <p:cNvPr id="11" name="Sign-off (dark)"/>
+          <p:cNvPicPr>
+            <a:picLocks noChangeAspect="1"/>
+          </p:cNvPicPr>
+          <p:nvPr userDrawn="1"/>
+        </p:nvPicPr>
+        <p:blipFill>
+          <a:blip r:embed="rId3"/>
+          <a:stretch>
+            <a:fillRect/>
+          </a:stretch>
+        </p:blipFill>
+        <p:spPr>
+          <a:xfrm>
+            <a:off x="731520" y="6309360"/>
+            <a:ext cx="2199018" cy="342900"/>
+          </a:xfrm>
+          <a:prstGeom prst="rect">
+            <a:avLst/>
+          </a:prstGeom>
+        </p:spPr>
+      </p:pic>
+      <p:sp>
+        <p:nvSpPr>
+          <p:cNvPr id="12" name="Title tab"/>
+          <p:cNvSpPr/>
+          <p:nvPr userDrawn="1"/>
+        </p:nvSpPr>
+        <p:spPr>
+          <a:xfrm>
+            <a:off x="0" y="2537460"/>
+            <a:ext cx="219456" cy="514350"/>
+          </a:xfrm>
+          <a:prstGeom prst="rect">
+            <a:avLst/>
+          </a:prstGeom>
+          <a:solidFill>
+            <a:schemeClr val="accent4"/>
+          </a:solidFill>
+          <a:ln>
+            <a:noFill/>
+          </a:ln>
+        </p:spPr>
+      </p:sp>
+      <p:sp>
+        <p:nvSpPr>
+          <p:cNvPr id="13" name="Title 1"/>
+          <p:cNvSpPr>
+            <a:spLocks noGrp="1"/>
+          </p:cNvSpPr>
+          <p:nvPr>
+            <p:ph type="title"/>
+          </p:nvPr>
+        </p:nvSpPr>
+        <p:spPr>
+          <a:xfrm>
+            <a:off x="731520" y="2057400"/>
+            <a:ext cx="7559040" cy="1097280"/>
+          </a:xfrm>
+          <a:prstGeom prst="rect">
+            <a:avLst/>
+          </a:prstGeom>
+        </p:spPr>
+        <p:txBody>
+          <a:bodyPr vert="horz" lIns="0" tIns="0" rIns="0" bIns="0" anchor="b">
+            <a:normAutofit/>
+          </a:bodyPr>
+          <a:lstStyle>
+            <a:lvl1pPr algn="l">
+              <a:lnSpc>
+                <a:spcPct val="90000"/>
+              </a:lnSpc>
+              <a:defRPr sz="4400" b="1">
+                <a:solidFill>
+                  <a:srgbClr val="000000"/>
+                </a:solidFill>
+                <a:latin typeface="+mj-lt"/>
+              </a:defRPr>
+            </a:lvl1pPr>
+          </a:lstStyle>
+          <a:p>
+            <a:r>
+              <a:rPr lang="en-US"/>
+              <a:t>Thank you</a:t>
+            </a:r>
+          </a:p>
+        </p:txBody>
+      </p:sp>
+      <p:sp>
+        <p:nvSpPr>
+          <p:cNvPr id="14" name="Content Placeholder 2"/>
+          <p:cNvSpPr>
+            <a:spLocks noGrp="1"/>
+          </p:cNvSpPr>
+          <p:nvPr>
+            <p:ph idx="1"/>
+          </p:nvPr>
+        </p:nvSpPr>
+        <p:spPr>
+          <a:xfrm>
+            <a:off x="731520" y="3360420"/>
+            <a:ext cx="7071360" cy="2468880"/>
+          </a:xfrm>
+          <a:prstGeom prst="rect">
+            <a:avLst/>
+          </a:prstGeom>
+        </p:spPr>
+        <p:txBody>
+          <a:bodyPr vert="horz" lIns="0" tIns="0" rIns="0" bIns="0" anchor="t">
+            <a:normAutofit/>
+          </a:bodyPr>
+          <a:lstStyle>
+            <a:lvl1pPr>
+              <a:defRPr sz="2000">
+                <a:solidFill>
+                  <a:srgbClr val="000000"/>
+                </a:solidFill>
+              </a:defRPr>
+            </a:lvl1pPr>
+            <a:lvl2pPr>
+              <a:defRPr sz="1800">
+                <a:solidFill>
+                  <a:srgbClr val="000000"/>
+                </a:solidFill>
+              </a:defRPr>
+            </a:lvl2pPr>
+            <a:lvl3pPr>
+              <a:defRPr sz="1600">
+                <a:solidFill>
+                  <a:srgbClr val="000000"/>
+                </a:solidFill>
+              </a:defRPr>
+            </a:lvl3pPr>
+          </a:lstStyle>
+          <a:p>
+            <a:r>
+              <a:rPr lang="en-US"/>
+              <a:t>Contact details</a:t>
+            </a:r>
+          </a:p>
+        </p:txBody>
+      </p:sp>
+      <p:sp>
+        <p:nvSpPr>
+          <p:cNvPr id="15" name="Slide Number Placeholder"/>
+          <p:cNvSpPr>
+            <a:spLocks noGrp="1"/>
+          </p:cNvSpPr>
+          <p:nvPr>
+            <p:ph type="sldNum" sz="quarter" idx="22"/>
+          </p:nvPr>
+        </p:nvSpPr>
+        <p:spPr>
+          <a:xfrm>
+            <a:off x="11704320" y="6480810"/>
+            <a:ext cx="475488" cy="363474"/>
+          </a:xfrm>
+        </p:spPr>
+        <p:txBody>
+          <a:bodyPr anchor="ctr"/>
+          <a:lstStyle>
+            <a:lvl1pPr algn="ctr">
+              <a:defRPr sz="1200" b="1">
+                <a:solidFill>
+                  <a:srgbClr val="000000"/>
+                </a:solidFill>
+              </a:defRPr>
+            </a:lvl1pPr>
+          </a:lstStyle>
+          <a:p>
+            <a:fld id="{C5EF2332-01BF-834F-8236-50238282D533}" type="slidenum">
+              <a:rPr lang="en-US"/>
+              <a:t>‹#›</a:t>
+            </a:fld>
+          </a:p>
+        </p:txBody>
+      </p:sp>
+      <p:sp>
+        <p:nvSpPr>
+          <p:cNvPr id="16" name="Date Placeholder"/>
+          <p:cNvSpPr>
+            <a:spLocks noGrp="1"/>
+          </p:cNvSpPr>
+          <p:nvPr>
+            <p:ph type="dt" sz="half" idx="20"/>
+          </p:nvPr>
+        </p:nvSpPr>
+        <p:spPr>
+          <a:xfrm>
+            <a:off x="9022080" y="6556248"/>
+            <a:ext cx="1377696" cy="185166"/>
+          </a:xfrm>
+          <a:prstGeom prst="rect">
+            <a:avLst/>
+          </a:prstGeom>
+        </p:spPr>
+        <p:txBody>
+          <a:bodyPr vert="horz" lIns="0" tIns="0" rIns="0" bIns="0" anchor="ctr"/>
+          <a:lstStyle>
+            <a:lvl1pPr algn="r">
+              <a:defRPr sz="900">
+                <a:solidFill>
+                  <a:srgbClr val="000000"/>
+                </a:solidFill>
+              </a:defRPr>
+            </a:lvl1pPr>
+          </a:lstStyle>
+          <a:p>
+            <a:r>
+              <a:rPr lang="en-US"/>
+              <a:t/>
+            </a:r>
+          </a:p>
+        </p:txBody>
+      </p:sp>
+      <p:sp>
+        <p:nvSpPr>
+          <p:cNvPr id="17" name="Footer Placeholder"/>
+          <p:cNvSpPr>
+            <a:spLocks noGrp="1"/>
+          </p:cNvSpPr>
+          <p:nvPr>
+            <p:ph type="ftr" sz="quarter" idx="21"/>
+          </p:nvPr>
+        </p:nvSpPr>
+        <p:spPr>
+          <a:xfrm>
+            <a:off x="560832" y="6556248"/>
+            <a:ext cx="4145280" cy="185166"/>
+          </a:xfrm>
+          <a:prstGeom prst="rect">
+            <a:avLst/>
+          </a:prstGeom>
+        </p:spPr>
+        <p:txBody>
+          <a:bodyPr vert="horz" lIns="0" tIns="0" rIns="0" bIns="0" anchor="ctr"/>
+          <a:lstStyle>
+            <a:lvl1pPr algn="l">
+              <a:defRPr sz="900">
+                <a:solidFill>
+                  <a:srgbClr val="000000"/>
+                </a:solidFill>
+              </a:defRPr>
+            </a:lvl1pPr>
+          </a:lstStyle>
+          <a:p>
+            <a:r>
+              <a:rPr lang="en-US"/>
+              <a:t/>
+            </a:r>
+          </a:p>
+        </p:txBody>
+      </p:sp>
+    </p:spTree>
+  </p:cSld>
+  <p:clrMapOvr>
+    <a:masterClrMapping/>
+  </p:clrMapOvr>
+</p:sldLayout>
+</file>
+
+<file path=ppt/slideLayouts/slideLayout9.xml><?xml version="1.0" encoding="utf-8"?>
+<p:sldLayout xmlns:a="http://schemas.openxmlformats.org/drawingml/2006/main" xmlns:r="http://schemas.openxmlformats.org/officeDocument/2006/relationships" xmlns:p="http://schemas.openxmlformats.org/presentationml/2006/main" type="title" preserve="1" showMasterSp="0">
+  <p:cSld name="Title Slide (light)">
+    <p:bg>
+      <p:bgPr>
+        <a:solidFill>
+          <a:schemeClr val="bg1"/>
+        </a:solidFill>
+        <a:effectLst/>
+      </p:bgPr>
+    </p:bg>
+    <p:spTree>
+      <p:nvGrpSpPr>
+        <p:cNvPr id="1" name=""/>
+        <p:cNvGrpSpPr/>
+        <p:nvPr/>
+      </p:nvGrpSpPr>
+      <p:grpSpPr>
+        <a:xfrm>
+          <a:off x="0" y="0"/>
+          <a:ext cx="0" cy="0"/>
+          <a:chOff x="0" y="0"/>
+          <a:chExt cx="0" cy="0"/>
+        </a:xfrm>
+      </p:grpSpPr>
+      <p:pic>
+        <p:nvPicPr>
+          <p:cNvPr id="11" name="Sign-off (light)"/>
+          <p:cNvPicPr>
+            <a:picLocks noChangeAspect="1"/>
+          </p:cNvPicPr>
+          <p:nvPr userDrawn="1"/>
+        </p:nvPicPr>
+        <p:blipFill>
+          <a:blip r:embed="rId3"/>
+          <a:stretch>
+            <a:fillRect/>
+          </a:stretch>
+        </p:blipFill>
+        <p:spPr>
+          <a:xfrm>
+            <a:off x="731520" y="6309360"/>
+            <a:ext cx="2199018" cy="342900"/>
+          </a:xfrm>
+          <a:prstGeom prst="rect">
+            <a:avLst/>
+          </a:prstGeom>
+        </p:spPr>
+      </p:pic>
+      <p:sp>
+        <p:nvSpPr>
+          <p:cNvPr id="12" name="Title tab"/>
+          <p:cNvSpPr/>
+          <p:nvPr userDrawn="1"/>
+        </p:nvSpPr>
+        <p:spPr>
+          <a:xfrm>
+            <a:off x="0" y="2948940"/>
+            <a:ext cx="219456" cy="1097280"/>
+          </a:xfrm>
+          <a:prstGeom prst="rect">
+            <a:avLst/>
+          </a:prstGeom>
+          <a:solidFill>
+            <a:schemeClr val="accent4"/>
+          </a:solidFill>
+          <a:ln>
+            <a:noFill/>
+          </a:ln>
+        </p:spPr>
+      </p:sp>
+      <p:sp>
+        <p:nvSpPr>
+          <p:cNvPr id="13" name="Date"/>
+          <p:cNvSpPr>
+            <a:spLocks noGrp="1"/>
+          </p:cNvSpPr>
+          <p:nvPr>
+            <p:ph type="dt" idx="20"/>
+          </p:nvPr>
+        </p:nvSpPr>
+        <p:spPr>
+          <a:xfrm>
+            <a:off x="731520" y="2571750"/>
+            <a:ext cx="5486400" cy="308610"/>
+          </a:xfrm>
+          <a:prstGeom prst="rect">
+            <a:avLst/>
+          </a:prstGeom>
+        </p:spPr>
+        <p:txBody>
+          <a:bodyPr vert="horz" lIns="0" tIns="0" rIns="0" bIns="0" anchor="t">
+            <a:normAutofit/>
+          </a:bodyPr>
+          <a:lstStyle>
+            <a:lvl1pPr algn="l" marL="0" indent="0">
+              <a:spcBef>
+                <a:spcPts val="0"/>
+              </a:spcBef>
+              <a:buNone/>
+              <a:defRPr sz="1200" b="1" cap="all">
+                <a:solidFill>
+                  <a:srgbClr val="000000"/>
+                </a:solidFill>
+                <a:latin typeface="+mn-lt"/>
+              </a:defRPr>
+            </a:lvl1pPr>
+          </a:lstStyle>
+          <a:p>
+            <a:fld id="{B6F15528-21DE-4FAA-801E-634DDDAF4B2B}" type="datetime1">
+              <a:rPr lang="en-US"/>
+              <a:t>Date</a:t>
+            </a:fld>
+          </a:p>
+        </p:txBody>
+      </p:sp>
+      <p:sp>
+        <p:nvSpPr>
+          <p:cNvPr id="14" name="Title"/>
+          <p:cNvSpPr>
+            <a:spLocks noGrp="1"/>
+          </p:cNvSpPr>
+          <p:nvPr>
+            <p:ph type="ctrTitle"/>
+          </p:nvPr>
+        </p:nvSpPr>
+        <p:spPr>
+          <a:xfrm>
+            <a:off x="731520" y="2948940"/>
+            <a:ext cx="6096000" cy="1097280"/>
+          </a:xfrm>
+          <a:prstGeom prst="rect">
+            <a:avLst/>
+          </a:prstGeom>
+        </p:spPr>
+        <p:txBody>
+          <a:bodyPr vert="horz" lIns="0" tIns="0" rIns="0" bIns="0" anchor="t">
+            <a:normAutofit/>
+          </a:bodyPr>
+          <a:lstStyle>
+            <a:lvl1pPr algn="l" marL="0" indent="0">
+              <a:spcBef>
+                <a:spcPts val="0"/>
+              </a:spcBef>
+              <a:buNone/>
+              <a:defRPr sz="3600" b="1">
+                <a:solidFill>
+                  <a:srgbClr val="000000"/>
+                </a:solidFill>
+                <a:latin typeface="+mn-lt"/>
+              </a:defRPr>
+            </a:lvl1pPr>
+          </a:lstStyle>
+          <a:p>
+            <a:r>
+              <a:rPr lang="en-US"/>
+              <a:t>Title</a:t>
+            </a:r>
+          </a:p>
+        </p:txBody>
+      </p:sp>
+      <p:cxnSp>
+        <p:nvCxnSpPr>
+          <p:cNvPr id="15" name="Title rule"/>
+          <p:cNvCxnSpPr/>
+          <p:nvPr userDrawn="1"/>
+        </p:nvCxnSpPr>
+        <p:spPr>
+          <a:xfrm>
+            <a:off x="731520" y="4217670"/>
+            <a:ext cx="792480" cy="0"/>
+          </a:xfrm>
+          <a:prstGeom prst="line">
+            <a:avLst/>
+          </a:prstGeom>
+          <a:ln w="19050">
+            <a:solidFill>
+              <a:schemeClr val="accent1"/>
+            </a:solidFill>
+          </a:ln>
+        </p:spPr>
+      </p:cxnSp>
+      <p:sp>
+        <p:nvSpPr>
+          <p:cNvPr id="16" name="Subtitle"/>
+          <p:cNvSpPr>
+            <a:spLocks noGrp="1"/>
+          </p:cNvSpPr>
+          <p:nvPr>
+            <p:ph type="subTitle" idx="1"/>
+          </p:nvPr>
+        </p:nvSpPr>
+        <p:spPr>
+          <a:xfrm>
+            <a:off x="731520" y="4389120"/>
+            <a:ext cx="6096000" cy="1508760"/>
+          </a:xfrm>
+          <a:prstGeom prst="rect">
+            <a:avLst/>
+          </a:prstGeom>
+        </p:spPr>
+        <p:txBody>
+          <a:bodyPr vert="horz" lIns="0" tIns="0" rIns="0" bIns="0" anchor="t">
+            <a:normAutofit/>
+          </a:bodyPr>
+          <a:lstStyle>
+            <a:lvl1pPr algn="l" marL="0" indent="0">
+              <a:spcBef>
+                <a:spcPts val="0"/>
+              </a:spcBef>
+              <a:buNone/>
+              <a:defRPr sz="1800" b="0">
+                <a:solidFill>
+                  <a:srgbClr val="000000"/>
+                </a:solidFill>
+                <a:latin typeface="+mn-lt"/>
+              </a:defRPr>
+            </a:lvl1pPr>
+          </a:lstStyle>
+          <a:p>
+            <a:r>
+              <a:rPr lang="en-US"/>
+              <a:t>Subtitle</a:t>
+            </a:r>
+          </a:p>
+        </p:txBody>
+      </p:sp>
+      <p:sp>
+        <p:nvSpPr>
+          <p:cNvPr id="17" name="Slide Number Placeholder"/>
+          <p:cNvSpPr>
+            <a:spLocks noGrp="1"/>
+          </p:cNvSpPr>
+          <p:nvPr>
+            <p:ph type="sldNum" sz="quarter" idx="22"/>
+          </p:nvPr>
+        </p:nvSpPr>
+        <p:spPr>
+          <a:xfrm>
+            <a:off x="11704320" y="6480810"/>
+            <a:ext cx="475488" cy="363474"/>
+          </a:xfrm>
+        </p:spPr>
+        <p:txBody>
+          <a:bodyPr anchor="ctr"/>
+          <a:lstStyle>
+            <a:lvl1pPr algn="ctr">
+              <a:defRPr sz="1200" b="1">
+                <a:solidFill>
+                  <a:srgbClr val="000000"/>
+                </a:solidFill>
+              </a:defRPr>
+            </a:lvl1pPr>
+          </a:lstStyle>
+          <a:p>
+            <a:fld id="{C5EF2332-01BF-834F-8236-50238282D533}" type="slidenum">
+              <a:rPr lang="en-US"/>
+              <a:t>‹#›</a:t>
+            </a:fld>
+          </a:p>
+        </p:txBody>
+      </p:sp>
+      <p:sp>
+        <p:nvSpPr>
+          <p:cNvPr id="19" name="Footer Placeholder"/>
+          <p:cNvSpPr>
+            <a:spLocks noGrp="1"/>
+          </p:cNvSpPr>
+          <p:nvPr>
+            <p:ph type="ftr" sz="quarter" idx="21"/>
+          </p:nvPr>
+        </p:nvSpPr>
+        <p:spPr>
+          <a:xfrm>
+            <a:off x="560832" y="6556248"/>
+            <a:ext cx="4145280" cy="185166"/>
+          </a:xfrm>
+          <a:prstGeom prst="rect">
+            <a:avLst/>
+          </a:prstGeom>
+        </p:spPr>
+        <p:txBody>
+          <a:bodyPr vert="horz" lIns="0" tIns="0" rIns="0" bIns="0" anchor="ctr"/>
+          <a:lstStyle>
+            <a:lvl1pPr algn="l">
+              <a:defRPr sz="900">
+                <a:solidFill>
+                  <a:srgbClr val="000000"/>
+                </a:solidFill>
+              </a:defRPr>
+            </a:lvl1pPr>
+          </a:lstStyle>
+          <a:p>
+            <a:r>
+              <a:rPr lang="en-US"/>
+              <a:t/>
+            </a:r>
+          </a:p>
+        </p:txBody>
+      </p:sp>
+    </p:spTree>
+  </p:cSld>
+  <p:clrMapOvr>
+    <a:masterClrMapping/>
+  </p:clrMapOvr>
+</p:sldLayout>
+</file>
+
 <file path=ppt/slideMasters/slideMaster1.xml><?xml version="1.0" encoding="utf-8"?>
 <p:sldMaster xmlns:a="http://schemas.openxmlformats.org/drawingml/2006/main" xmlns:r="http://schemas.openxmlformats.org/officeDocument/2006/relationships" xmlns:p="http://schemas.openxmlformats.org/presentationml/2006/main">
   <p:cSld>
@@ -1975,6 +2571,8 @@
     <p:sldLayoutId id="2147483653" r:id="rId14"/>
     <p:sldLayoutId id="2147483654" r:id="rId15"/>
     <p:sldLayoutId id="2147483655" r:id="rId16"/>
+    <p:sldLayoutId id="2147483656" r:id="rId17"/>
+    <p:sldLayoutId id="2147483657" r:id="rId18"/>
   </p:sldLayoutIdLst>
   <p:txStyles>
     <p:titleStyle>

--- a/docs/common/liveries/cu/template.pptx
+++ b/docs/common/liveries/cu/template.pptx
@@ -56,8 +56,8 @@
         </p:blipFill>
         <p:spPr>
           <a:xfrm>
-            <a:off x="731520" y="6309360"/>
-            <a:ext cx="2199018" cy="342900"/>
+            <a:off x="731520" y="6343650"/>
+            <a:ext cx="2990911" cy="274320"/>
           </a:xfrm>
           <a:prstGeom prst="rect">
             <a:avLst/>
@@ -556,8 +556,8 @@
         </p:blipFill>
         <p:spPr>
           <a:xfrm>
-            <a:off x="731520" y="6309360"/>
-            <a:ext cx="2199018" cy="342900"/>
+            <a:off x="731520" y="6343650"/>
+            <a:ext cx="2990911" cy="274320"/>
           </a:xfrm>
           <a:prstGeom prst="rect">
             <a:avLst/>
@@ -1714,8 +1714,8 @@
         </p:blipFill>
         <p:spPr>
           <a:xfrm>
-            <a:off x="731520" y="6309360"/>
-            <a:ext cx="2199018" cy="342900"/>
+            <a:off x="731520" y="6343650"/>
+            <a:ext cx="2990911" cy="274320"/>
           </a:xfrm>
           <a:prstGeom prst="rect">
             <a:avLst/>
@@ -2002,8 +2002,8 @@
         </p:blipFill>
         <p:spPr>
           <a:xfrm>
-            <a:off x="731520" y="6309360"/>
-            <a:ext cx="2199018" cy="342900"/>
+            <a:off x="731520" y="6343650"/>
+            <a:ext cx="2990911" cy="274320"/>
           </a:xfrm>
           <a:prstGeom prst="rect">
             <a:avLst/>
@@ -2552,8 +2552,8 @@
         </p:blipFill>
         <p:spPr>
           <a:xfrm>
-            <a:off x="731520" y="6309360"/>
-            <a:ext cx="2199018" cy="342900"/>
+            <a:off x="731520" y="6343650"/>
+            <a:ext cx="2990911" cy="274320"/>
           </a:xfrm>
           <a:prstGeom prst="rect">
             <a:avLst/>

--- a/docs/common/liveries/cu/template.pptx
+++ b/docs/common/liveries/cu/template.pptx
@@ -42,7 +42,7 @@
       </p:grpSpPr>
       <p:pic>
         <p:nvPicPr>
-          <p:cNvPr id="11" name="Sign-off (dark)"/>
+          <p:cNvPr id="11" name="Sign-off (primary)"/>
           <p:cNvPicPr>
             <a:picLocks noChangeAspect="1"/>
           </p:cNvPicPr>
@@ -57,7 +57,7 @@
         <p:spPr>
           <a:xfrm>
             <a:off x="731520" y="6343650"/>
-            <a:ext cx="2990911" cy="274320"/>
+            <a:ext cx="2990698" cy="274320"/>
           </a:xfrm>
           <a:prstGeom prst="rect">
             <a:avLst/>
@@ -72,7 +72,7 @@
         </p:nvSpPr>
         <p:spPr>
           <a:xfrm>
-            <a:off x="0" y="2948940"/>
+            <a:off x="0" y="1748790"/>
             <a:ext cx="219456" cy="1097280"/>
           </a:xfrm>
           <a:prstGeom prst="rect">
@@ -98,8 +98,8 @@
         </p:nvSpPr>
         <p:spPr>
           <a:xfrm>
-            <a:off x="731520" y="2571750"/>
-            <a:ext cx="5486400" cy="308610"/>
+            <a:off x="731520" y="1371600"/>
+            <a:ext cx="6096000" cy="308610"/>
           </a:xfrm>
           <a:prstGeom prst="rect">
             <a:avLst/>
@@ -143,7 +143,7 @@
         </p:nvSpPr>
         <p:spPr>
           <a:xfrm>
-            <a:off x="731520" y="2948940"/>
+            <a:off x="731520" y="1748790"/>
             <a:ext cx="6096000" cy="1097280"/>
           </a:xfrm>
           <a:prstGeom prst="rect">
@@ -184,13 +184,13 @@
         </p:nvCxnSpPr>
         <p:spPr>
           <a:xfrm>
-            <a:off x="731520" y="4217670"/>
-            <a:ext cx="792480" cy="0"/>
+            <a:off x="731520" y="3017520"/>
+            <a:ext cx="1584960" cy="0"/>
           </a:xfrm>
           <a:prstGeom prst="line">
             <a:avLst/>
           </a:prstGeom>
-          <a:ln w="19050">
+          <a:ln w="22631">
             <a:solidFill>
               <a:schemeClr val="accent1"/>
             </a:solidFill>
@@ -209,8 +209,8 @@
         </p:nvSpPr>
         <p:spPr>
           <a:xfrm>
-            <a:off x="731520" y="4389120"/>
-            <a:ext cx="6096000" cy="1508760"/>
+            <a:off x="731520" y="3188970"/>
+            <a:ext cx="6096000" cy="2708910"/>
           </a:xfrm>
           <a:prstGeom prst="rect">
             <a:avLst/>
@@ -280,6 +280,294 @@
       <p:sp>
         <p:nvSpPr>
           <p:cNvPr id="19" name="Footer Placeholder"/>
+          <p:cNvSpPr>
+            <a:spLocks noGrp="1"/>
+          </p:cNvSpPr>
+          <p:nvPr>
+            <p:ph type="ftr" sz="quarter" idx="21"/>
+          </p:nvPr>
+        </p:nvSpPr>
+        <p:spPr>
+          <a:xfrm>
+            <a:off x="560832" y="6556248"/>
+            <a:ext cx="4145280" cy="185166"/>
+          </a:xfrm>
+          <a:prstGeom prst="rect">
+            <a:avLst/>
+          </a:prstGeom>
+        </p:spPr>
+        <p:txBody>
+          <a:bodyPr vert="horz" lIns="0" tIns="0" rIns="0" bIns="0" anchor="ctr"/>
+          <a:lstStyle>
+            <a:lvl1pPr algn="l">
+              <a:defRPr sz="900">
+                <a:solidFill>
+                  <a:srgbClr val="000000"/>
+                </a:solidFill>
+              </a:defRPr>
+            </a:lvl1pPr>
+          </a:lstStyle>
+          <a:p>
+            <a:r>
+              <a:rPr lang="en-US"/>
+              <a:t/>
+            </a:r>
+          </a:p>
+        </p:txBody>
+      </p:sp>
+    </p:spTree>
+  </p:cSld>
+  <p:clrMapOvr>
+    <a:masterClrMapping/>
+  </p:clrMapOvr>
+</p:sldLayout>
+</file>
+
+<file path=ppt/slideLayouts/slideLayout10.xml><?xml version="1.0" encoding="utf-8"?>
+<p:sldLayout xmlns:a="http://schemas.openxmlformats.org/drawingml/2006/main" xmlns:r="http://schemas.openxmlformats.org/officeDocument/2006/relationships" xmlns:p="http://schemas.openxmlformats.org/presentationml/2006/main" type="obj" preserve="1" showMasterSp="0">
+  <p:cSld name="Closing (light)">
+    <p:bg>
+      <p:bgPr>
+        <a:solidFill>
+          <a:schemeClr val="bg1"/>
+        </a:solidFill>
+        <a:effectLst/>
+      </p:bgPr>
+    </p:bg>
+    <p:spTree>
+      <p:nvGrpSpPr>
+        <p:cNvPr id="1" name=""/>
+        <p:cNvGrpSpPr/>
+        <p:nvPr/>
+      </p:nvGrpSpPr>
+      <p:grpSpPr>
+        <a:xfrm>
+          <a:off x="0" y="0"/>
+          <a:ext cx="0" cy="0"/>
+          <a:chOff x="0" y="0"/>
+          <a:chExt cx="0" cy="0"/>
+        </a:xfrm>
+      </p:grpSpPr>
+      <p:pic>
+        <p:nvPicPr>
+          <p:cNvPr id="11" name="Sign-off (background)"/>
+          <p:cNvPicPr>
+            <a:picLocks noChangeAspect="1"/>
+          </p:cNvPicPr>
+          <p:nvPr userDrawn="1"/>
+        </p:nvPicPr>
+        <p:blipFill>
+          <a:blip r:embed="rId3"/>
+          <a:stretch>
+            <a:fillRect/>
+          </a:stretch>
+        </p:blipFill>
+        <p:spPr>
+          <a:xfrm>
+            <a:off x="731520" y="6343650"/>
+            <a:ext cx="2990698" cy="274320"/>
+          </a:xfrm>
+          <a:prstGeom prst="rect">
+            <a:avLst/>
+          </a:prstGeom>
+        </p:spPr>
+      </p:pic>
+      <p:sp>
+        <p:nvSpPr>
+          <p:cNvPr id="12" name="Title tab"/>
+          <p:cNvSpPr/>
+          <p:nvPr userDrawn="1"/>
+        </p:nvSpPr>
+        <p:spPr>
+          <a:xfrm>
+            <a:off x="0" y="3154680"/>
+            <a:ext cx="219456" cy="514350"/>
+          </a:xfrm>
+          <a:prstGeom prst="rect">
+            <a:avLst/>
+          </a:prstGeom>
+          <a:solidFill>
+            <a:schemeClr val="accent4"/>
+          </a:solidFill>
+          <a:ln>
+            <a:noFill/>
+          </a:ln>
+        </p:spPr>
+      </p:sp>
+      <p:sp>
+        <p:nvSpPr>
+          <p:cNvPr id="13" name="Title 1"/>
+          <p:cNvSpPr>
+            <a:spLocks noGrp="1"/>
+          </p:cNvSpPr>
+          <p:nvPr>
+            <p:ph type="title"/>
+          </p:nvPr>
+        </p:nvSpPr>
+        <p:spPr>
+          <a:xfrm>
+            <a:off x="731520" y="1508760"/>
+            <a:ext cx="7559040" cy="2263140"/>
+          </a:xfrm>
+          <a:prstGeom prst="rect">
+            <a:avLst/>
+          </a:prstGeom>
+        </p:spPr>
+        <p:txBody>
+          <a:bodyPr vert="horz" lIns="0" tIns="0" rIns="0" bIns="0" anchor="b">
+            <a:normAutofit/>
+          </a:bodyPr>
+          <a:lstStyle>
+            <a:lvl1pPr algn="l">
+              <a:lnSpc>
+                <a:spcPct val="90000"/>
+              </a:lnSpc>
+              <a:defRPr sz="4400" b="1">
+                <a:solidFill>
+                  <a:srgbClr val="000000"/>
+                </a:solidFill>
+                <a:latin typeface="+mj-lt"/>
+              </a:defRPr>
+            </a:lvl1pPr>
+          </a:lstStyle>
+          <a:p>
+            <a:r>
+              <a:rPr lang="en-US"/>
+              <a:t>Thank you</a:t>
+            </a:r>
+          </a:p>
+        </p:txBody>
+      </p:sp>
+      <p:sp>
+        <p:nvSpPr>
+          <p:cNvPr id="14" name="Content Placeholder 2"/>
+          <p:cNvSpPr>
+            <a:spLocks noGrp="1"/>
+          </p:cNvSpPr>
+          <p:nvPr>
+            <p:ph idx="1"/>
+          </p:nvPr>
+        </p:nvSpPr>
+        <p:spPr>
+          <a:xfrm>
+            <a:off x="731520" y="3977640"/>
+            <a:ext cx="7559040" cy="2057400"/>
+          </a:xfrm>
+          <a:prstGeom prst="rect">
+            <a:avLst/>
+          </a:prstGeom>
+        </p:spPr>
+        <p:txBody>
+          <a:bodyPr vert="horz" lIns="0" tIns="0" rIns="0" bIns="0" anchor="t">
+            <a:normAutofit/>
+          </a:bodyPr>
+          <a:lstStyle>
+            <a:lvl1pPr>
+              <a:defRPr sz="2000">
+                <a:solidFill>
+                  <a:srgbClr val="000000"/>
+                </a:solidFill>
+              </a:defRPr>
+            </a:lvl1pPr>
+            <a:lvl2pPr>
+              <a:defRPr sz="1800">
+                <a:solidFill>
+                  <a:srgbClr val="000000"/>
+                </a:solidFill>
+              </a:defRPr>
+            </a:lvl2pPr>
+            <a:lvl3pPr>
+              <a:defRPr sz="1600">
+                <a:solidFill>
+                  <a:srgbClr val="000000"/>
+                </a:solidFill>
+              </a:defRPr>
+            </a:lvl3pPr>
+          </a:lstStyle>
+          <a:p>
+            <a:r>
+              <a:rPr lang="en-US"/>
+              <a:t>Contact details</a:t>
+            </a:r>
+          </a:p>
+        </p:txBody>
+      </p:sp>
+      <p:sp>
+        <p:nvSpPr>
+          <p:cNvPr id="15" name="Slide Number Placeholder"/>
+          <p:cNvSpPr>
+            <a:spLocks noGrp="1"/>
+          </p:cNvSpPr>
+          <p:nvPr>
+            <p:ph type="sldNum" sz="quarter" idx="22"/>
+          </p:nvPr>
+        </p:nvSpPr>
+        <p:spPr>
+          <a:xfrm>
+            <a:off x="11704320" y="6480810"/>
+            <a:ext cx="475488" cy="363474"/>
+          </a:xfrm>
+        </p:spPr>
+        <p:txBody>
+          <a:bodyPr anchor="ctr"/>
+          <a:lstStyle>
+            <a:lvl1pPr algn="ctr">
+              <a:defRPr sz="1200" b="1">
+                <a:solidFill>
+                  <a:srgbClr val="000000"/>
+                </a:solidFill>
+              </a:defRPr>
+            </a:lvl1pPr>
+          </a:lstStyle>
+          <a:p>
+            <a:fld id="{C5EF2332-01BF-834F-8236-50238282D533}" type="slidenum">
+              <a:rPr lang="en-US"/>
+              <a:t>‹#›</a:t>
+            </a:fld>
+          </a:p>
+        </p:txBody>
+      </p:sp>
+      <p:sp>
+        <p:nvSpPr>
+          <p:cNvPr id="16" name="Date Placeholder"/>
+          <p:cNvSpPr>
+            <a:spLocks noGrp="1"/>
+          </p:cNvSpPr>
+          <p:nvPr>
+            <p:ph type="dt" sz="half" idx="20"/>
+          </p:nvPr>
+        </p:nvSpPr>
+        <p:spPr>
+          <a:xfrm>
+            <a:off x="9022080" y="6556248"/>
+            <a:ext cx="1377696" cy="185166"/>
+          </a:xfrm>
+          <a:prstGeom prst="rect">
+            <a:avLst/>
+          </a:prstGeom>
+        </p:spPr>
+        <p:txBody>
+          <a:bodyPr vert="horz" lIns="0" tIns="0" rIns="0" bIns="0" anchor="ctr"/>
+          <a:lstStyle>
+            <a:lvl1pPr algn="r">
+              <a:defRPr sz="900">
+                <a:solidFill>
+                  <a:srgbClr val="000000"/>
+                </a:solidFill>
+              </a:defRPr>
+            </a:lvl1pPr>
+          </a:lstStyle>
+          <a:p>
+            <a:r>
+              <a:rPr lang="en-US"/>
+              <a:t/>
+            </a:r>
+          </a:p>
+        </p:txBody>
+      </p:sp>
+      <p:sp>
+        <p:nvSpPr>
+          <p:cNvPr id="17" name="Footer Placeholder"/>
           <p:cNvSpPr>
             <a:spLocks noGrp="1"/>
           </p:cNvSpPr>
@@ -542,7 +830,7 @@
       </p:grpSpPr>
       <p:pic>
         <p:nvPicPr>
-          <p:cNvPr id="11" name="Sign-off (dark)"/>
+          <p:cNvPr id="11" name="Sign-off (primary)"/>
           <p:cNvPicPr>
             <a:picLocks noChangeAspect="1"/>
           </p:cNvPicPr>
@@ -557,7 +845,7 @@
         <p:spPr>
           <a:xfrm>
             <a:off x="731520" y="6343650"/>
-            <a:ext cx="2990911" cy="274320"/>
+            <a:ext cx="2990698" cy="274320"/>
           </a:xfrm>
           <a:prstGeom prst="rect">
             <a:avLst/>
@@ -576,15 +864,15 @@
         </p:nvSpPr>
         <p:spPr>
           <a:xfrm>
-            <a:off x="731520" y="3048000"/>
-            <a:ext cx="7559040" cy="838200"/>
-          </a:xfrm>
-          <a:prstGeom prst="rect">
-            <a:avLst/>
-          </a:prstGeom>
-        </p:spPr>
-        <p:txBody>
-          <a:bodyPr lIns="0" tIns="0" rIns="0" bIns="0" anchor="t">
+            <a:off x="731520" y="2758288"/>
+            <a:ext cx="7559040" cy="822960"/>
+          </a:xfrm>
+          <a:prstGeom prst="rect">
+            <a:avLst/>
+          </a:prstGeom>
+        </p:spPr>
+        <p:txBody>
+          <a:bodyPr lIns="0" tIns="0" rIns="0" bIns="0" anchor="b">
             <a:normAutofit/>
           </a:bodyPr>
           <a:lstStyle>
@@ -620,8 +908,8 @@
         </p:nvSpPr>
         <p:spPr>
           <a:xfrm>
-            <a:off x="731520" y="3962400"/>
-            <a:ext cx="7315200" cy="914400"/>
+            <a:off x="731520" y="3649828"/>
+            <a:ext cx="7559040" cy="912114"/>
           </a:xfrm>
           <a:prstGeom prst="rect">
             <a:avLst/>
@@ -1700,7 +1988,7 @@
       </p:grpSpPr>
       <p:pic>
         <p:nvPicPr>
-          <p:cNvPr id="11" name="Sign-off (dark)"/>
+          <p:cNvPr id="11" name="Sign-off (primary)"/>
           <p:cNvPicPr>
             <a:picLocks noChangeAspect="1"/>
           </p:cNvPicPr>
@@ -1715,7 +2003,7 @@
         <p:spPr>
           <a:xfrm>
             <a:off x="731520" y="6343650"/>
-            <a:ext cx="2990911" cy="274320"/>
+            <a:ext cx="2990698" cy="274320"/>
           </a:xfrm>
           <a:prstGeom prst="rect">
             <a:avLst/>
@@ -1730,7 +2018,7 @@
         </p:nvSpPr>
         <p:spPr>
           <a:xfrm>
-            <a:off x="0" y="2537460"/>
+            <a:off x="0" y="3154680"/>
             <a:ext cx="219456" cy="514350"/>
           </a:xfrm>
           <a:prstGeom prst="rect">
@@ -1756,8 +2044,8 @@
         </p:nvSpPr>
         <p:spPr>
           <a:xfrm>
-            <a:off x="731520" y="2057400"/>
-            <a:ext cx="7559040" cy="1097280"/>
+            <a:off x="731520" y="1508760"/>
+            <a:ext cx="7559040" cy="2263140"/>
           </a:xfrm>
           <a:prstGeom prst="rect">
             <a:avLst/>
@@ -1800,8 +2088,8 @@
         </p:nvSpPr>
         <p:spPr>
           <a:xfrm>
-            <a:off x="731520" y="3360420"/>
-            <a:ext cx="7071360" cy="2468880"/>
+            <a:off x="731520" y="3977640"/>
+            <a:ext cx="7559040" cy="2057400"/>
           </a:xfrm>
           <a:prstGeom prst="rect">
             <a:avLst/>
@@ -1988,7 +2276,7 @@
       </p:grpSpPr>
       <p:pic>
         <p:nvPicPr>
-          <p:cNvPr id="11" name="Sign-off (light)"/>
+          <p:cNvPr id="11" name="Sign-off (background)"/>
           <p:cNvPicPr>
             <a:picLocks noChangeAspect="1"/>
           </p:cNvPicPr>
@@ -2003,7 +2291,7 @@
         <p:spPr>
           <a:xfrm>
             <a:off x="731520" y="6343650"/>
-            <a:ext cx="2990911" cy="274320"/>
+            <a:ext cx="2990698" cy="274320"/>
           </a:xfrm>
           <a:prstGeom prst="rect">
             <a:avLst/>
@@ -2018,7 +2306,7 @@
         </p:nvSpPr>
         <p:spPr>
           <a:xfrm>
-            <a:off x="0" y="2948940"/>
+            <a:off x="0" y="1748790"/>
             <a:ext cx="219456" cy="1097280"/>
           </a:xfrm>
           <a:prstGeom prst="rect">
@@ -2044,8 +2332,8 @@
         </p:nvSpPr>
         <p:spPr>
           <a:xfrm>
-            <a:off x="731520" y="2571750"/>
-            <a:ext cx="5486400" cy="308610"/>
+            <a:off x="731520" y="1371600"/>
+            <a:ext cx="6096000" cy="308610"/>
           </a:xfrm>
           <a:prstGeom prst="rect">
             <a:avLst/>
@@ -2089,7 +2377,7 @@
         </p:nvSpPr>
         <p:spPr>
           <a:xfrm>
-            <a:off x="731520" y="2948940"/>
+            <a:off x="731520" y="1748790"/>
             <a:ext cx="6096000" cy="1097280"/>
           </a:xfrm>
           <a:prstGeom prst="rect">
@@ -2130,13 +2418,13 @@
         </p:nvCxnSpPr>
         <p:spPr>
           <a:xfrm>
-            <a:off x="731520" y="4217670"/>
-            <a:ext cx="792480" cy="0"/>
+            <a:off x="731520" y="3017520"/>
+            <a:ext cx="1584960" cy="0"/>
           </a:xfrm>
           <a:prstGeom prst="line">
             <a:avLst/>
           </a:prstGeom>
-          <a:ln w="19050">
+          <a:ln w="22631">
             <a:solidFill>
               <a:schemeClr val="accent1"/>
             </a:solidFill>
@@ -2155,8 +2443,8 @@
         </p:nvSpPr>
         <p:spPr>
           <a:xfrm>
-            <a:off x="731520" y="4389120"/>
-            <a:ext cx="6096000" cy="1508760"/>
+            <a:off x="731520" y="3188970"/>
+            <a:ext cx="6096000" cy="2708910"/>
           </a:xfrm>
           <a:prstGeom prst="rect">
             <a:avLst/>
@@ -2427,7 +2715,7 @@
       </p:sp>
       <p:sp>
         <p:nvSpPr>
-          <p:cNvPr id="16" name="Slide Number Placeholder"/>
+          <p:cNvPr id="17" name="Slide Number Placeholder"/>
           <p:cNvSpPr>
             <a:spLocks noGrp="1"/>
           </p:cNvSpPr>
@@ -2462,7 +2750,7 @@
       </p:sp>
       <p:sp>
         <p:nvSpPr>
-          <p:cNvPr id="17" name="Date Placeholder"/>
+          <p:cNvPr id="18" name="Date Placeholder"/>
           <p:cNvSpPr>
             <a:spLocks noGrp="1"/>
           </p:cNvSpPr>
@@ -2500,7 +2788,7 @@
       </p:sp>
       <p:sp>
         <p:nvSpPr>
-          <p:cNvPr id="18" name="Footer Placeholder"/>
+          <p:cNvPr id="19" name="Footer Placeholder"/>
           <p:cNvSpPr>
             <a:spLocks noGrp="1"/>
           </p:cNvSpPr>
@@ -2538,7 +2826,7 @@
       </p:sp>
       <p:pic>
         <p:nvPicPr>
-          <p:cNvPr id="19" name="Sign-off (light)"/>
+          <p:cNvPr id="16" name="Sign-off (light)"/>
           <p:cNvPicPr>
             <a:picLocks noChangeAspect="1"/>
           </p:cNvPicPr>
@@ -2573,6 +2861,7 @@
     <p:sldLayoutId id="2147483655" r:id="rId16"/>
     <p:sldLayoutId id="2147483656" r:id="rId17"/>
     <p:sldLayoutId id="2147483657" r:id="rId18"/>
+    <p:sldLayoutId id="2147483658" r:id="rId19"/>
   </p:sldLayoutIdLst>
   <p:txStyles>
     <p:titleStyle>

--- a/docs/common/liveries/cu/template.pptx
+++ b/docs/common/liveries/cu/template.pptx
@@ -115,7 +115,7 @@
                 <a:spcPts val="0"/>
               </a:spcBef>
               <a:buNone/>
-              <a:defRPr sz="1200" b="1" cap="all">
+              <a:defRPr sz="1008" b="1" cap="all">
                 <a:solidFill>
                   <a:srgbClr val="000000"/>
                 </a:solidFill>
@@ -160,7 +160,7 @@
                 <a:spcPts val="0"/>
               </a:spcBef>
               <a:buNone/>
-              <a:defRPr sz="3600" b="1">
+              <a:defRPr sz="3863" b="1">
                 <a:solidFill>
                   <a:srgbClr val="000000"/>
                 </a:solidFill>
@@ -226,7 +226,7 @@
                 <a:spcPts val="0"/>
               </a:spcBef>
               <a:buNone/>
-              <a:defRPr sz="1800" b="0">
+              <a:defRPr sz="1679" b="0">
                 <a:solidFill>
                   <a:srgbClr val="000000"/>
                 </a:solidFill>
@@ -422,7 +422,7 @@
               <a:lnSpc>
                 <a:spcPct val="90000"/>
               </a:lnSpc>
-              <a:defRPr sz="4400" b="1">
+              <a:defRPr sz="4366" b="1">
                 <a:solidFill>
                   <a:srgbClr val="000000"/>
                 </a:solidFill>
@@ -463,21 +463,21 @@
           </a:bodyPr>
           <a:lstStyle>
             <a:lvl1pPr>
-              <a:defRPr sz="2000">
+              <a:defRPr sz="1679">
                 <a:solidFill>
                   <a:srgbClr val="000000"/>
                 </a:solidFill>
               </a:defRPr>
             </a:lvl1pPr>
             <a:lvl2pPr>
-              <a:defRPr sz="1800">
+              <a:defRPr sz="1511">
                 <a:solidFill>
                   <a:srgbClr val="000000"/>
                 </a:solidFill>
               </a:defRPr>
             </a:lvl2pPr>
             <a:lvl3pPr>
-              <a:defRPr sz="1600">
+              <a:defRPr sz="1360">
                 <a:solidFill>
                   <a:srgbClr val="000000"/>
                 </a:solidFill>
@@ -880,7 +880,7 @@
               <a:lnSpc>
                 <a:spcPct val="90000"/>
               </a:lnSpc>
-              <a:defRPr sz="4400" b="1" cap="none" baseline="0">
+              <a:defRPr sz="4366" b="1" cap="none" baseline="0">
                 <a:solidFill>
                   <a:srgbClr val="000000"/>
                 </a:solidFill>
@@ -925,7 +925,7 @@
                 <a:spcPts val="0"/>
               </a:spcBef>
               <a:buNone/>
-              <a:defRPr sz="1800" b="0">
+              <a:defRPr sz="1847" b="0">
                 <a:solidFill>
                   <a:srgbClr val="000000"/>
                 </a:solidFill>
@@ -1351,7 +1351,7 @@
           <a:lstStyle>
             <a:lvl1pPr marL="0" indent="0">
               <a:buNone/>
-              <a:defRPr sz="1800" b="1">
+              <a:defRPr sz="1847" b="1">
                 <a:solidFill>
                   <a:schemeClr val="tx2"/>
                 </a:solidFill>
@@ -1422,7 +1422,7 @@
           <a:lstStyle>
             <a:lvl1pPr marL="0" indent="0">
               <a:buNone/>
-              <a:defRPr sz="1800" b="1">
+              <a:defRPr sz="1847" b="1">
                 <a:solidFill>
                   <a:schemeClr val="tx2"/>
                 </a:solidFill>
@@ -1628,7 +1628,7 @@
           </a:bodyPr>
           <a:lstStyle>
             <a:lvl1pPr algn="l">
-              <a:defRPr sz="2000" b="1"/>
+              <a:defRPr sz="1847" b="1"/>
             </a:lvl1pPr>
           </a:lstStyle>
           <a:p>
@@ -1695,7 +1695,7 @@
           <a:lstStyle>
             <a:lvl1pPr marL="0" indent="0">
               <a:buNone/>
-              <a:defRPr sz="1400"/>
+              <a:defRPr sz="1427"/>
             </a:lvl1pPr>
           </a:lstStyle>
           <a:p>
@@ -2060,7 +2060,7 @@
               <a:lnSpc>
                 <a:spcPct val="90000"/>
               </a:lnSpc>
-              <a:defRPr sz="4400" b="1">
+              <a:defRPr sz="4366" b="1">
                 <a:solidFill>
                   <a:srgbClr val="000000"/>
                 </a:solidFill>
@@ -2101,21 +2101,21 @@
           </a:bodyPr>
           <a:lstStyle>
             <a:lvl1pPr>
-              <a:defRPr sz="2000">
+              <a:defRPr sz="1679">
                 <a:solidFill>
                   <a:srgbClr val="000000"/>
                 </a:solidFill>
               </a:defRPr>
             </a:lvl1pPr>
             <a:lvl2pPr>
-              <a:defRPr sz="1800">
+              <a:defRPr sz="1511">
                 <a:solidFill>
                   <a:srgbClr val="000000"/>
                 </a:solidFill>
               </a:defRPr>
             </a:lvl2pPr>
             <a:lvl3pPr>
-              <a:defRPr sz="1600">
+              <a:defRPr sz="1360">
                 <a:solidFill>
                   <a:srgbClr val="000000"/>
                 </a:solidFill>
@@ -2349,7 +2349,7 @@
                 <a:spcPts val="0"/>
               </a:spcBef>
               <a:buNone/>
-              <a:defRPr sz="1200" b="1" cap="all">
+              <a:defRPr sz="1008" b="1" cap="all">
                 <a:solidFill>
                   <a:srgbClr val="000000"/>
                 </a:solidFill>
@@ -2394,7 +2394,7 @@
                 <a:spcPts val="0"/>
               </a:spcBef>
               <a:buNone/>
-              <a:defRPr sz="3600" b="1">
+              <a:defRPr sz="3863" b="1">
                 <a:solidFill>
                   <a:srgbClr val="000000"/>
                 </a:solidFill>
@@ -2460,7 +2460,7 @@
                 <a:spcPts val="0"/>
               </a:spcBef>
               <a:buNone/>
-              <a:defRPr sz="1800" b="0">
+              <a:defRPr sz="1679" b="0">
                 <a:solidFill>
                   <a:srgbClr val="000000"/>
                 </a:solidFill>
@@ -2870,7 +2870,7 @@
           <a:spcPct val="0"/>
         </a:spcBef>
         <a:buNone/>
-        <a:defRPr sz="2800" b="1" kern="1200" baseline="0">
+        <a:defRPr sz="2759" b="1" kern="1200" baseline="0">
           <a:solidFill>
             <a:schemeClr val="tx1"/>
           </a:solidFill>
@@ -2886,11 +2886,11 @@
           <a:spcPct val="100000"/>
         </a:lnSpc>
         <a:spcBef>
-          <a:spcPts val="1000"/>
+          <a:spcPts val="840"/>
         </a:spcBef>
         <a:buFont typeface="Arial"/>
         <a:buChar char="•"/>
-        <a:defRPr sz="2000" kern="1200">
+        <a:defRPr sz="1679" kern="1200">
           <a:solidFill>
             <a:schemeClr val="tx1"/>
           </a:solidFill>
@@ -2904,11 +2904,11 @@
           <a:spcPct val="100000"/>
         </a:lnSpc>
         <a:spcBef>
-          <a:spcPts val="500"/>
+          <a:spcPts val="504"/>
         </a:spcBef>
         <a:buFont typeface="Wingdings"/>
         <a:buChar char="§"/>
-        <a:defRPr sz="1800" kern="1200">
+        <a:defRPr sz="1511" kern="1200">
           <a:solidFill>
             <a:schemeClr val="tx1"/>
           </a:solidFill>
@@ -2922,11 +2922,11 @@
           <a:spcPct val="100000"/>
         </a:lnSpc>
         <a:spcBef>
-          <a:spcPts val="500"/>
+          <a:spcPts val="504"/>
         </a:spcBef>
         <a:buFont typeface="Courier New"/>
         <a:buChar char="o"/>
-        <a:defRPr sz="1600" kern="1200">
+        <a:defRPr sz="1360" kern="1200">
           <a:solidFill>
             <a:schemeClr val="tx1"/>
           </a:solidFill>
@@ -2940,11 +2940,11 @@
           <a:spcPct val="100000"/>
         </a:lnSpc>
         <a:spcBef>
-          <a:spcPts val="500"/>
+          <a:spcPts val="504"/>
         </a:spcBef>
         <a:buFont typeface="Arial"/>
         <a:buChar char="–"/>
-        <a:defRPr sz="1400" kern="1200">
+        <a:defRPr sz="1224" kern="1200">
           <a:solidFill>
             <a:schemeClr val="tx1"/>
           </a:solidFill>
@@ -2958,11 +2958,11 @@
           <a:spcPct val="100000"/>
         </a:lnSpc>
         <a:spcBef>
-          <a:spcPts val="500"/>
+          <a:spcPts val="504"/>
         </a:spcBef>
         <a:buFont typeface="Arial"/>
         <a:buChar char="»"/>
-        <a:defRPr sz="1200" kern="1200">
+        <a:defRPr sz="1102" kern="1200">
           <a:solidFill>
             <a:schemeClr val="tx1"/>
           </a:solidFill>
@@ -2972,7 +2972,7 @@
         </a:defRPr>
       </a:lvl5pPr>
       <a:lvl6pPr marL="1371600" indent="-228600" algn="l">
-        <a:defRPr sz="1200" kern="1200">
+        <a:defRPr sz="1102" kern="1200">
           <a:solidFill>
             <a:schemeClr val="tx1"/>
           </a:solidFill>
@@ -2980,7 +2980,7 @@
         </a:defRPr>
       </a:lvl6pPr>
       <a:lvl7pPr marL="1600200" indent="-228600" algn="l">
-        <a:defRPr sz="1200" kern="1200">
+        <a:defRPr sz="1102" kern="1200">
           <a:solidFill>
             <a:schemeClr val="tx1"/>
           </a:solidFill>
@@ -2988,7 +2988,7 @@
         </a:defRPr>
       </a:lvl7pPr>
       <a:lvl8pPr marL="1828800" indent="-228600" algn="l">
-        <a:defRPr sz="1200" kern="1200">
+        <a:defRPr sz="1102" kern="1200">
           <a:solidFill>
             <a:schemeClr val="tx1"/>
           </a:solidFill>
@@ -2996,7 +2996,7 @@
         </a:defRPr>
       </a:lvl8pPr>
       <a:lvl9pPr marL="2057400" indent="-228600" algn="l">
-        <a:defRPr sz="1200" kern="1200">
+        <a:defRPr sz="1102" kern="1200">
           <a:solidFill>
             <a:schemeClr val="tx1"/>
           </a:solidFill>
@@ -3009,7 +3009,7 @@
         <a:defRPr lang="en-US"/>
       </a:defPPr>
       <a:lvl1pPr marL="0" algn="l" defTabSz="457200">
-        <a:defRPr sz="1800" kern="1200">
+        <a:defRPr sz="1427" kern="1200">
           <a:solidFill>
             <a:schemeClr val="tx1"/>
           </a:solidFill>
@@ -3019,7 +3019,7 @@
         </a:defRPr>
       </a:lvl1pPr>
       <a:lvl2pPr marL="457200" algn="l" defTabSz="457200">
-        <a:defRPr sz="1800" kern="1200">
+        <a:defRPr sz="1427" kern="1200">
           <a:solidFill>
             <a:schemeClr val="tx1"/>
           </a:solidFill>
@@ -3029,7 +3029,7 @@
         </a:defRPr>
       </a:lvl2pPr>
       <a:lvl3pPr marL="914400" algn="l" defTabSz="457200">
-        <a:defRPr sz="1800" kern="1200">
+        <a:defRPr sz="1427" kern="1200">
           <a:solidFill>
             <a:schemeClr val="tx1"/>
           </a:solidFill>
@@ -3039,7 +3039,7 @@
         </a:defRPr>
       </a:lvl3pPr>
       <a:lvl4pPr marL="1371600" algn="l" defTabSz="457200">
-        <a:defRPr sz="1800" kern="1200">
+        <a:defRPr sz="1427" kern="1200">
           <a:solidFill>
             <a:schemeClr val="tx1"/>
           </a:solidFill>
@@ -3049,7 +3049,7 @@
         </a:defRPr>
       </a:lvl4pPr>
       <a:lvl5pPr marL="1828800" algn="l" defTabSz="457200">
-        <a:defRPr sz="1800" kern="1200">
+        <a:defRPr sz="1427" kern="1200">
           <a:solidFill>
             <a:schemeClr val="tx1"/>
           </a:solidFill>
@@ -3059,7 +3059,7 @@
         </a:defRPr>
       </a:lvl5pPr>
       <a:lvl6pPr marL="2286000" algn="l" defTabSz="457200">
-        <a:defRPr sz="1800" kern="1200">
+        <a:defRPr sz="1427" kern="1200">
           <a:solidFill>
             <a:schemeClr val="tx1"/>
           </a:solidFill>
@@ -3069,7 +3069,7 @@
         </a:defRPr>
       </a:lvl6pPr>
       <a:lvl7pPr marL="2743200" algn="l" defTabSz="457200">
-        <a:defRPr sz="1800" kern="1200">
+        <a:defRPr sz="1427" kern="1200">
           <a:solidFill>
             <a:schemeClr val="tx1"/>
           </a:solidFill>
@@ -3079,7 +3079,7 @@
         </a:defRPr>
       </a:lvl7pPr>
       <a:lvl8pPr marL="3200400" algn="l" defTabSz="457200">
-        <a:defRPr sz="1800" kern="1200">
+        <a:defRPr sz="1427" kern="1200">
           <a:solidFill>
             <a:schemeClr val="tx1"/>
           </a:solidFill>
@@ -3089,7 +3089,7 @@
         </a:defRPr>
       </a:lvl8pPr>
       <a:lvl9pPr marL="3657600" algn="l" defTabSz="457200">
-        <a:defRPr sz="1800" kern="1200">
+        <a:defRPr sz="1427" kern="1200">
           <a:solidFill>
             <a:schemeClr val="tx1"/>
           </a:solidFill>

--- a/docs/common/liveries/cu/template.pptx
+++ b/docs/common/liveries/cu/template.pptx
@@ -115,7 +115,7 @@
                 <a:spcPts val="0"/>
               </a:spcBef>
               <a:buNone/>
-              <a:defRPr sz="1008" b="1" cap="all">
+              <a:defRPr sz="2800" b="1" cap="all">
                 <a:solidFill>
                   <a:srgbClr val="000000"/>
                 </a:solidFill>
@@ -160,7 +160,7 @@
                 <a:spcPts val="0"/>
               </a:spcBef>
               <a:buNone/>
-              <a:defRPr sz="3863" b="1">
+              <a:defRPr sz="4800" b="1">
                 <a:solidFill>
                   <a:srgbClr val="000000"/>
                 </a:solidFill>
@@ -226,7 +226,7 @@
                 <a:spcPts val="0"/>
               </a:spcBef>
               <a:buNone/>
-              <a:defRPr sz="1679" b="0">
+              <a:defRPr sz="2800" b="0">
                 <a:solidFill>
                   <a:srgbClr val="000000"/>
                 </a:solidFill>
@@ -262,7 +262,7 @@
           <a:bodyPr anchor="ctr"/>
           <a:lstStyle>
             <a:lvl1pPr algn="ctr">
-              <a:defRPr sz="1200" b="1">
+              <a:defRPr sz="900" b="1">
                 <a:solidFill>
                   <a:srgbClr val="000000"/>
                 </a:solidFill>
@@ -422,7 +422,7 @@
               <a:lnSpc>
                 <a:spcPct val="90000"/>
               </a:lnSpc>
-              <a:defRPr sz="4366" b="1">
+              <a:defRPr sz="4800" b="1">
                 <a:solidFill>
                   <a:srgbClr val="000000"/>
                 </a:solidFill>
@@ -463,21 +463,21 @@
           </a:bodyPr>
           <a:lstStyle>
             <a:lvl1pPr>
-              <a:defRPr sz="1679">
+              <a:defRPr sz="1600">
                 <a:solidFill>
                   <a:srgbClr val="000000"/>
                 </a:solidFill>
               </a:defRPr>
             </a:lvl1pPr>
             <a:lvl2pPr>
-              <a:defRPr sz="1511">
+              <a:defRPr sz="1400">
                 <a:solidFill>
                   <a:srgbClr val="000000"/>
                 </a:solidFill>
               </a:defRPr>
             </a:lvl2pPr>
             <a:lvl3pPr>
-              <a:defRPr sz="1360">
+              <a:defRPr sz="1300">
                 <a:solidFill>
                   <a:srgbClr val="000000"/>
                 </a:solidFill>
@@ -512,7 +512,7 @@
           <a:bodyPr anchor="ctr"/>
           <a:lstStyle>
             <a:lvl1pPr algn="ctr">
-              <a:defRPr sz="1200" b="1">
+              <a:defRPr sz="900" b="1">
                 <a:solidFill>
                   <a:srgbClr val="000000"/>
                 </a:solidFill>
@@ -704,7 +704,7 @@
           <a:bodyPr anchor="ctr"/>
           <a:lstStyle>
             <a:lvl1pPr algn="ctr">
-              <a:defRPr sz="1200" b="1">
+              <a:defRPr sz="900" b="1">
                 <a:solidFill>
                   <a:schemeClr val="tx1"/>
                 </a:solidFill>
@@ -880,7 +880,7 @@
               <a:lnSpc>
                 <a:spcPct val="90000"/>
               </a:lnSpc>
-              <a:defRPr sz="4366" b="1" cap="none" baseline="0">
+              <a:defRPr sz="6000" b="1" cap="none" baseline="0">
                 <a:solidFill>
                   <a:srgbClr val="000000"/>
                 </a:solidFill>
@@ -925,7 +925,7 @@
                 <a:spcPts val="0"/>
               </a:spcBef>
               <a:buNone/>
-              <a:defRPr sz="1847" b="0">
+              <a:defRPr sz="2000" b="0">
                 <a:solidFill>
                   <a:srgbClr val="000000"/>
                 </a:solidFill>
@@ -961,7 +961,7 @@
           <a:bodyPr anchor="ctr"/>
           <a:lstStyle>
             <a:lvl1pPr algn="ctr">
-              <a:defRPr sz="1200" b="1">
+              <a:defRPr sz="900" b="1">
                 <a:solidFill>
                   <a:srgbClr val="000000"/>
                 </a:solidFill>
@@ -1183,7 +1183,7 @@
           <a:bodyPr anchor="ctr"/>
           <a:lstStyle>
             <a:lvl1pPr algn="ctr">
-              <a:defRPr sz="1200" b="1">
+              <a:defRPr sz="900" b="1">
                 <a:solidFill>
                   <a:schemeClr val="tx1"/>
                 </a:solidFill>
@@ -1351,7 +1351,7 @@
           <a:lstStyle>
             <a:lvl1pPr marL="0" indent="0">
               <a:buNone/>
-              <a:defRPr sz="1847" b="1">
+              <a:defRPr sz="2000" b="1">
                 <a:solidFill>
                   <a:schemeClr val="tx2"/>
                 </a:solidFill>
@@ -1422,7 +1422,7 @@
           <a:lstStyle>
             <a:lvl1pPr marL="0" indent="0">
               <a:buNone/>
-              <a:defRPr sz="1847" b="1">
+              <a:defRPr sz="2000" b="1">
                 <a:solidFill>
                   <a:schemeClr val="tx2"/>
                 </a:solidFill>
@@ -1487,7 +1487,7 @@
           <a:bodyPr anchor="ctr"/>
           <a:lstStyle>
             <a:lvl1pPr algn="ctr">
-              <a:defRPr sz="1200" b="1">
+              <a:defRPr sz="900" b="1">
                 <a:solidFill>
                   <a:schemeClr val="tx1"/>
                 </a:solidFill>
@@ -1628,7 +1628,7 @@
           </a:bodyPr>
           <a:lstStyle>
             <a:lvl1pPr algn="l">
-              <a:defRPr sz="1847" b="1"/>
+              <a:defRPr sz="2000" b="1"/>
             </a:lvl1pPr>
           </a:lstStyle>
           <a:p>
@@ -1695,7 +1695,7 @@
           <a:lstStyle>
             <a:lvl1pPr marL="0" indent="0">
               <a:buNone/>
-              <a:defRPr sz="1427"/>
+              <a:defRPr sz="1300"/>
             </a:lvl1pPr>
           </a:lstStyle>
           <a:p>
@@ -1726,7 +1726,7 @@
           <a:bodyPr anchor="ctr"/>
           <a:lstStyle>
             <a:lvl1pPr algn="ctr">
-              <a:defRPr sz="1200" b="1">
+              <a:defRPr sz="900" b="1">
                 <a:solidFill>
                   <a:schemeClr val="tx1"/>
                 </a:solidFill>
@@ -1862,7 +1862,7 @@
           <a:bodyPr anchor="ctr"/>
           <a:lstStyle>
             <a:lvl1pPr algn="ctr">
-              <a:defRPr sz="1200" b="1">
+              <a:defRPr sz="900" b="1">
                 <a:solidFill>
                   <a:schemeClr val="tx1"/>
                 </a:solidFill>
@@ -2060,7 +2060,7 @@
               <a:lnSpc>
                 <a:spcPct val="90000"/>
               </a:lnSpc>
-              <a:defRPr sz="4366" b="1">
+              <a:defRPr sz="4800" b="1">
                 <a:solidFill>
                   <a:srgbClr val="000000"/>
                 </a:solidFill>
@@ -2101,21 +2101,21 @@
           </a:bodyPr>
           <a:lstStyle>
             <a:lvl1pPr>
-              <a:defRPr sz="1679">
+              <a:defRPr sz="1600">
                 <a:solidFill>
                   <a:srgbClr val="000000"/>
                 </a:solidFill>
               </a:defRPr>
             </a:lvl1pPr>
             <a:lvl2pPr>
-              <a:defRPr sz="1511">
+              <a:defRPr sz="1400">
                 <a:solidFill>
                   <a:srgbClr val="000000"/>
                 </a:solidFill>
               </a:defRPr>
             </a:lvl2pPr>
             <a:lvl3pPr>
-              <a:defRPr sz="1360">
+              <a:defRPr sz="1300">
                 <a:solidFill>
                   <a:srgbClr val="000000"/>
                 </a:solidFill>
@@ -2150,7 +2150,7 @@
           <a:bodyPr anchor="ctr"/>
           <a:lstStyle>
             <a:lvl1pPr algn="ctr">
-              <a:defRPr sz="1200" b="1">
+              <a:defRPr sz="900" b="1">
                 <a:solidFill>
                   <a:srgbClr val="000000"/>
                 </a:solidFill>
@@ -2349,7 +2349,7 @@
                 <a:spcPts val="0"/>
               </a:spcBef>
               <a:buNone/>
-              <a:defRPr sz="1008" b="1" cap="all">
+              <a:defRPr sz="2800" b="1" cap="all">
                 <a:solidFill>
                   <a:srgbClr val="000000"/>
                 </a:solidFill>
@@ -2394,7 +2394,7 @@
                 <a:spcPts val="0"/>
               </a:spcBef>
               <a:buNone/>
-              <a:defRPr sz="3863" b="1">
+              <a:defRPr sz="4800" b="1">
                 <a:solidFill>
                   <a:srgbClr val="000000"/>
                 </a:solidFill>
@@ -2460,7 +2460,7 @@
                 <a:spcPts val="0"/>
               </a:spcBef>
               <a:buNone/>
-              <a:defRPr sz="1679" b="0">
+              <a:defRPr sz="2800" b="0">
                 <a:solidFill>
                   <a:srgbClr val="000000"/>
                 </a:solidFill>
@@ -2496,7 +2496,7 @@
           <a:bodyPr anchor="ctr"/>
           <a:lstStyle>
             <a:lvl1pPr algn="ctr">
-              <a:defRPr sz="1200" b="1">
+              <a:defRPr sz="900" b="1">
                 <a:solidFill>
                   <a:srgbClr val="000000"/>
                 </a:solidFill>
@@ -2733,7 +2733,7 @@
           <a:bodyPr anchor="ctr"/>
           <a:lstStyle>
             <a:lvl1pPr algn="ctr">
-              <a:defRPr sz="1200" b="1">
+              <a:defRPr sz="900" b="1">
                 <a:solidFill>
                   <a:schemeClr val="tx1"/>
                 </a:solidFill>
@@ -2870,7 +2870,7 @@
           <a:spcPct val="0"/>
         </a:spcBef>
         <a:buNone/>
-        <a:defRPr sz="2759" b="1" kern="1200" baseline="0">
+        <a:defRPr sz="3200" b="1" kern="1200" baseline="0">
           <a:solidFill>
             <a:schemeClr val="tx1"/>
           </a:solidFill>
@@ -2886,11 +2886,11 @@
           <a:spcPct val="100000"/>
         </a:lnSpc>
         <a:spcBef>
-          <a:spcPts val="840"/>
+          <a:spcPts val="800"/>
         </a:spcBef>
         <a:buFont typeface="Arial"/>
         <a:buChar char="•"/>
-        <a:defRPr sz="1679" kern="1200">
+        <a:defRPr sz="1600" kern="1200">
           <a:solidFill>
             <a:schemeClr val="tx1"/>
           </a:solidFill>
@@ -2904,11 +2904,11 @@
           <a:spcPct val="100000"/>
         </a:lnSpc>
         <a:spcBef>
-          <a:spcPts val="504"/>
+          <a:spcPts val="480"/>
         </a:spcBef>
         <a:buFont typeface="Wingdings"/>
         <a:buChar char="§"/>
-        <a:defRPr sz="1511" kern="1200">
+        <a:defRPr sz="1400" kern="1200">
           <a:solidFill>
             <a:schemeClr val="tx1"/>
           </a:solidFill>
@@ -2922,11 +2922,11 @@
           <a:spcPct val="100000"/>
         </a:lnSpc>
         <a:spcBef>
-          <a:spcPts val="504"/>
+          <a:spcPts val="480"/>
         </a:spcBef>
         <a:buFont typeface="Courier New"/>
         <a:buChar char="o"/>
-        <a:defRPr sz="1360" kern="1200">
+        <a:defRPr sz="1300" kern="1200">
           <a:solidFill>
             <a:schemeClr val="tx1"/>
           </a:solidFill>
@@ -2940,11 +2940,11 @@
           <a:spcPct val="100000"/>
         </a:lnSpc>
         <a:spcBef>
-          <a:spcPts val="504"/>
+          <a:spcPts val="480"/>
         </a:spcBef>
         <a:buFont typeface="Arial"/>
         <a:buChar char="–"/>
-        <a:defRPr sz="1224" kern="1200">
+        <a:defRPr sz="1200" kern="1200">
           <a:solidFill>
             <a:schemeClr val="tx1"/>
           </a:solidFill>
@@ -2958,11 +2958,11 @@
           <a:spcPct val="100000"/>
         </a:lnSpc>
         <a:spcBef>
-          <a:spcPts val="504"/>
+          <a:spcPts val="480"/>
         </a:spcBef>
         <a:buFont typeface="Arial"/>
         <a:buChar char="»"/>
-        <a:defRPr sz="1102" kern="1200">
+        <a:defRPr sz="1100" kern="1200">
           <a:solidFill>
             <a:schemeClr val="tx1"/>
           </a:solidFill>
@@ -2972,7 +2972,7 @@
         </a:defRPr>
       </a:lvl5pPr>
       <a:lvl6pPr marL="1371600" indent="-228600" algn="l">
-        <a:defRPr sz="1102" kern="1200">
+        <a:defRPr sz="1100" kern="1200">
           <a:solidFill>
             <a:schemeClr val="tx1"/>
           </a:solidFill>
@@ -2980,7 +2980,7 @@
         </a:defRPr>
       </a:lvl6pPr>
       <a:lvl7pPr marL="1600200" indent="-228600" algn="l">
-        <a:defRPr sz="1102" kern="1200">
+        <a:defRPr sz="1100" kern="1200">
           <a:solidFill>
             <a:schemeClr val="tx1"/>
           </a:solidFill>
@@ -2988,7 +2988,7 @@
         </a:defRPr>
       </a:lvl7pPr>
       <a:lvl8pPr marL="1828800" indent="-228600" algn="l">
-        <a:defRPr sz="1102" kern="1200">
+        <a:defRPr sz="1100" kern="1200">
           <a:solidFill>
             <a:schemeClr val="tx1"/>
           </a:solidFill>
@@ -2996,7 +2996,7 @@
         </a:defRPr>
       </a:lvl8pPr>
       <a:lvl9pPr marL="2057400" indent="-228600" algn="l">
-        <a:defRPr sz="1102" kern="1200">
+        <a:defRPr sz="1100" kern="1200">
           <a:solidFill>
             <a:schemeClr val="tx1"/>
           </a:solidFill>
@@ -3009,7 +3009,7 @@
         <a:defRPr lang="en-US"/>
       </a:defPPr>
       <a:lvl1pPr marL="0" algn="l" defTabSz="457200">
-        <a:defRPr sz="1427" kern="1200">
+        <a:defRPr sz="1300" kern="1200">
           <a:solidFill>
             <a:schemeClr val="tx1"/>
           </a:solidFill>
@@ -3019,7 +3019,7 @@
         </a:defRPr>
       </a:lvl1pPr>
       <a:lvl2pPr marL="457200" algn="l" defTabSz="457200">
-        <a:defRPr sz="1427" kern="1200">
+        <a:defRPr sz="1300" kern="1200">
           <a:solidFill>
             <a:schemeClr val="tx1"/>
           </a:solidFill>
@@ -3029,7 +3029,7 @@
         </a:defRPr>
       </a:lvl2pPr>
       <a:lvl3pPr marL="914400" algn="l" defTabSz="457200">
-        <a:defRPr sz="1427" kern="1200">
+        <a:defRPr sz="1300" kern="1200">
           <a:solidFill>
             <a:schemeClr val="tx1"/>
           </a:solidFill>
@@ -3039,7 +3039,7 @@
         </a:defRPr>
       </a:lvl3pPr>
       <a:lvl4pPr marL="1371600" algn="l" defTabSz="457200">
-        <a:defRPr sz="1427" kern="1200">
+        <a:defRPr sz="1300" kern="1200">
           <a:solidFill>
             <a:schemeClr val="tx1"/>
           </a:solidFill>
@@ -3049,7 +3049,7 @@
         </a:defRPr>
       </a:lvl4pPr>
       <a:lvl5pPr marL="1828800" algn="l" defTabSz="457200">
-        <a:defRPr sz="1427" kern="1200">
+        <a:defRPr sz="1300" kern="1200">
           <a:solidFill>
             <a:schemeClr val="tx1"/>
           </a:solidFill>
@@ -3059,7 +3059,7 @@
         </a:defRPr>
       </a:lvl5pPr>
       <a:lvl6pPr marL="2286000" algn="l" defTabSz="457200">
-        <a:defRPr sz="1427" kern="1200">
+        <a:defRPr sz="1300" kern="1200">
           <a:solidFill>
             <a:schemeClr val="tx1"/>
           </a:solidFill>
@@ -3069,7 +3069,7 @@
         </a:defRPr>
       </a:lvl6pPr>
       <a:lvl7pPr marL="2743200" algn="l" defTabSz="457200">
-        <a:defRPr sz="1427" kern="1200">
+        <a:defRPr sz="1300" kern="1200">
           <a:solidFill>
             <a:schemeClr val="tx1"/>
           </a:solidFill>
@@ -3079,7 +3079,7 @@
         </a:defRPr>
       </a:lvl7pPr>
       <a:lvl8pPr marL="3200400" algn="l" defTabSz="457200">
-        <a:defRPr sz="1427" kern="1200">
+        <a:defRPr sz="1300" kern="1200">
           <a:solidFill>
             <a:schemeClr val="tx1"/>
           </a:solidFill>
@@ -3089,7 +3089,7 @@
         </a:defRPr>
       </a:lvl8pPr>
       <a:lvl9pPr marL="3657600" algn="l" defTabSz="457200">
-        <a:defRPr sz="1427" kern="1200">
+        <a:defRPr sz="1300" kern="1200">
           <a:solidFill>
             <a:schemeClr val="tx1"/>
           </a:solidFill>

--- a/docs/common/liveries/cu/template.pptx
+++ b/docs/common/liveries/cu/template.pptx
@@ -226,7 +226,7 @@
                 <a:spcPts val="0"/>
               </a:spcBef>
               <a:buNone/>
-              <a:defRPr sz="2800" b="0">
+              <a:defRPr sz="2000" b="0">
                 <a:solidFill>
                   <a:srgbClr val="000000"/>
                 </a:solidFill>
@@ -2460,7 +2460,7 @@
                 <a:spcPts val="0"/>
               </a:spcBef>
               <a:buNone/>
-              <a:defRPr sz="2800" b="0">
+              <a:defRPr sz="2000" b="0">
                 <a:solidFill>
                   <a:srgbClr val="000000"/>
                 </a:solidFill>
